--- a/prompt_engineering/pe-4-advanced-ReAct_prompting.pptx
+++ b/prompt_engineering/pe-4-advanced-ReAct_prompting.pptx
@@ -5,12 +5,22 @@
     <p:sldMasterId id="2147483648" r:id="rId1"/>
   </p:sldMasterIdLst>
   <p:handoutMasterIdLst>
-    <p:handoutMasterId r:id="rId5"/>
+    <p:handoutMasterId r:id="rId15"/>
   </p:handoutMasterIdLst>
   <p:sldIdLst>
     <p:sldId id="257" r:id="rId2"/>
     <p:sldId id="269" r:id="rId3"/>
     <p:sldId id="270" r:id="rId4"/>
+    <p:sldId id="280" r:id="rId5"/>
+    <p:sldId id="271" r:id="rId6"/>
+    <p:sldId id="272" r:id="rId7"/>
+    <p:sldId id="273" r:id="rId8"/>
+    <p:sldId id="274" r:id="rId9"/>
+    <p:sldId id="275" r:id="rId10"/>
+    <p:sldId id="276" r:id="rId11"/>
+    <p:sldId id="278" r:id="rId12"/>
+    <p:sldId id="279" r:id="rId13"/>
+    <p:sldId id="277" r:id="rId14"/>
   </p:sldIdLst>
   <p:sldSz cx="12192000" cy="6858000"/>
   <p:notesSz cx="6858000" cy="9144000"/>
@@ -214,7 +224,7 @@
           <a:p>
             <a:fld id="{7BAEECA8-D063-486F-AE31-5020270C1449}" type="datetimeFigureOut">
               <a:rPr lang="en-US" smtClean="0"/>
-              <a:t>6/16/2026</a:t>
+              <a:t>9/20/2026</a:t>
             </a:fld>
             <a:endParaRPr lang="en-US"/>
           </a:p>
@@ -456,7 +466,7 @@
           <a:p>
             <a:fld id="{6383FAE1-13DE-4511-8C1B-C8AFB720664C}" type="datetimeFigureOut">
               <a:rPr lang="en-US" smtClean="0"/>
-              <a:t>6/16/2026</a:t>
+              <a:t>9/20/2026</a:t>
             </a:fld>
             <a:endParaRPr lang="en-US"/>
           </a:p>
@@ -654,7 +664,7 @@
           <a:p>
             <a:fld id="{6383FAE1-13DE-4511-8C1B-C8AFB720664C}" type="datetimeFigureOut">
               <a:rPr lang="en-US" smtClean="0"/>
-              <a:t>6/16/2026</a:t>
+              <a:t>9/20/2026</a:t>
             </a:fld>
             <a:endParaRPr lang="en-US"/>
           </a:p>
@@ -862,7 +872,7 @@
           <a:p>
             <a:fld id="{6383FAE1-13DE-4511-8C1B-C8AFB720664C}" type="datetimeFigureOut">
               <a:rPr lang="en-US" smtClean="0"/>
-              <a:t>6/16/2026</a:t>
+              <a:t>9/20/2026</a:t>
             </a:fld>
             <a:endParaRPr lang="en-US"/>
           </a:p>
@@ -1060,7 +1070,7 @@
           <a:p>
             <a:fld id="{6383FAE1-13DE-4511-8C1B-C8AFB720664C}" type="datetimeFigureOut">
               <a:rPr lang="en-US" smtClean="0"/>
-              <a:t>6/16/2026</a:t>
+              <a:t>9/20/2026</a:t>
             </a:fld>
             <a:endParaRPr lang="en-US"/>
           </a:p>
@@ -1335,7 +1345,7 @@
           <a:p>
             <a:fld id="{6383FAE1-13DE-4511-8C1B-C8AFB720664C}" type="datetimeFigureOut">
               <a:rPr lang="en-US" smtClean="0"/>
-              <a:t>6/16/2026</a:t>
+              <a:t>9/20/2026</a:t>
             </a:fld>
             <a:endParaRPr lang="en-US"/>
           </a:p>
@@ -1600,7 +1610,7 @@
           <a:p>
             <a:fld id="{6383FAE1-13DE-4511-8C1B-C8AFB720664C}" type="datetimeFigureOut">
               <a:rPr lang="en-US" smtClean="0"/>
-              <a:t>6/16/2026</a:t>
+              <a:t>9/20/2026</a:t>
             </a:fld>
             <a:endParaRPr lang="en-US"/>
           </a:p>
@@ -2012,7 +2022,7 @@
           <a:p>
             <a:fld id="{6383FAE1-13DE-4511-8C1B-C8AFB720664C}" type="datetimeFigureOut">
               <a:rPr lang="en-US" smtClean="0"/>
-              <a:t>6/16/2026</a:t>
+              <a:t>9/20/2026</a:t>
             </a:fld>
             <a:endParaRPr lang="en-US"/>
           </a:p>
@@ -2153,7 +2163,7 @@
           <a:p>
             <a:fld id="{6383FAE1-13DE-4511-8C1B-C8AFB720664C}" type="datetimeFigureOut">
               <a:rPr lang="en-US" smtClean="0"/>
-              <a:t>6/16/2026</a:t>
+              <a:t>9/20/2026</a:t>
             </a:fld>
             <a:endParaRPr lang="en-US"/>
           </a:p>
@@ -2266,7 +2276,7 @@
           <a:p>
             <a:fld id="{6383FAE1-13DE-4511-8C1B-C8AFB720664C}" type="datetimeFigureOut">
               <a:rPr lang="en-US" smtClean="0"/>
-              <a:t>6/16/2026</a:t>
+              <a:t>9/20/2026</a:t>
             </a:fld>
             <a:endParaRPr lang="en-US"/>
           </a:p>
@@ -2577,7 +2587,7 @@
           <a:p>
             <a:fld id="{6383FAE1-13DE-4511-8C1B-C8AFB720664C}" type="datetimeFigureOut">
               <a:rPr lang="en-US" smtClean="0"/>
-              <a:t>6/16/2026</a:t>
+              <a:t>9/20/2026</a:t>
             </a:fld>
             <a:endParaRPr lang="en-US"/>
           </a:p>
@@ -2868,7 +2878,7 @@
           <a:p>
             <a:fld id="{6383FAE1-13DE-4511-8C1B-C8AFB720664C}" type="datetimeFigureOut">
               <a:rPr lang="en-US" smtClean="0"/>
-              <a:t>6/16/2026</a:t>
+              <a:t>9/20/2026</a:t>
             </a:fld>
             <a:endParaRPr lang="en-US"/>
           </a:p>
@@ -3112,7 +3122,7 @@
           <a:p>
             <a:fld id="{6383FAE1-13DE-4511-8C1B-C8AFB720664C}" type="datetimeFigureOut">
               <a:rPr lang="en-US" smtClean="0"/>
-              <a:t>6/16/2026</a:t>
+              <a:t>9/20/2026</a:t>
             </a:fld>
             <a:endParaRPr lang="en-US"/>
           </a:p>
@@ -3749,6 +3759,665 @@
 </p:sld>
 </file>
 
+<file path=ppt/slides/slide10.xml><?xml version="1.0" encoding="utf-8"?>
+<p:sld xmlns:a="http://schemas.openxmlformats.org/drawingml/2006/main" xmlns:r="http://schemas.openxmlformats.org/officeDocument/2006/relationships" xmlns:p="http://schemas.openxmlformats.org/presentationml/2006/main">
+  <p:cSld>
+    <p:spTree>
+      <p:nvGrpSpPr>
+        <p:cNvPr id="1" name="">
+          <a:extLst>
+            <a:ext uri="{FF2B5EF4-FFF2-40B4-BE49-F238E27FC236}">
+              <a16:creationId xmlns:a16="http://schemas.microsoft.com/office/drawing/2014/main" id="{33A7C65E-E261-096A-EF02-B094DEC14D6E}"/>
+            </a:ext>
+          </a:extLst>
+        </p:cNvPr>
+        <p:cNvGrpSpPr/>
+        <p:nvPr/>
+      </p:nvGrpSpPr>
+      <p:grpSpPr>
+        <a:xfrm>
+          <a:off x="0" y="0"/>
+          <a:ext cx="0" cy="0"/>
+          <a:chOff x="0" y="0"/>
+          <a:chExt cx="0" cy="0"/>
+        </a:xfrm>
+      </p:grpSpPr>
+      <p:sp>
+        <p:nvSpPr>
+          <p:cNvPr id="8" name="TextBox 7">
+            <a:extLst>
+              <a:ext uri="{FF2B5EF4-FFF2-40B4-BE49-F238E27FC236}">
+                <a16:creationId xmlns:a16="http://schemas.microsoft.com/office/drawing/2014/main" id="{CD0DA9EC-FAE7-F36A-0777-541061301F09}"/>
+              </a:ext>
+            </a:extLst>
+          </p:cNvPr>
+          <p:cNvSpPr txBox="1"/>
+          <p:nvPr/>
+        </p:nvSpPr>
+        <p:spPr>
+          <a:xfrm>
+            <a:off x="672084" y="1335024"/>
+            <a:ext cx="10410444" cy="4893647"/>
+          </a:xfrm>
+          <a:prstGeom prst="rect">
+            <a:avLst/>
+          </a:prstGeom>
+          <a:noFill/>
+        </p:spPr>
+        <p:txBody>
+          <a:bodyPr wrap="square">
+            <a:spAutoFit/>
+          </a:bodyPr>
+          <a:lstStyle/>
+          <a:p>
+            <a:r>
+              <a:rPr lang="en-US" sz="2400" dirty="0">
+                <a:solidFill>
+                  <a:schemeClr val="accent6">
+                    <a:lumMod val="60000"/>
+                    <a:lumOff val="40000"/>
+                  </a:schemeClr>
+                </a:solidFill>
+              </a:rPr>
+              <a:t>You are an AI travel assistant using </a:t>
+            </a:r>
+            <a:r>
+              <a:rPr lang="en-US" sz="2400" b="1" i="1" dirty="0" err="1">
+                <a:solidFill>
+                  <a:schemeClr val="accent6">
+                    <a:lumMod val="60000"/>
+                    <a:lumOff val="40000"/>
+                  </a:schemeClr>
+                </a:solidFill>
+              </a:rPr>
+              <a:t>ReAct</a:t>
+            </a:r>
+            <a:r>
+              <a:rPr lang="en-US" sz="2400" b="1" i="1" dirty="0">
+                <a:solidFill>
+                  <a:schemeClr val="accent6">
+                    <a:lumMod val="60000"/>
+                    <a:lumOff val="40000"/>
+                  </a:schemeClr>
+                </a:solidFill>
+              </a:rPr>
+              <a:t> </a:t>
+            </a:r>
+            <a:r>
+              <a:rPr lang="en-US" sz="2400" dirty="0">
+                <a:solidFill>
+                  <a:schemeClr val="accent6">
+                    <a:lumMod val="60000"/>
+                    <a:lumOff val="40000"/>
+                  </a:schemeClr>
+                </a:solidFill>
+              </a:rPr>
+              <a:t>prompting.</a:t>
+            </a:r>
+          </a:p>
+          <a:p>
+            <a:r>
+              <a:rPr lang="en-US" sz="2400" dirty="0">
+                <a:solidFill>
+                  <a:schemeClr val="accent6">
+                    <a:lumMod val="60000"/>
+                    <a:lumOff val="40000"/>
+                  </a:schemeClr>
+                </a:solidFill>
+              </a:rPr>
+              <a:t>For every query, think step-by-step (</a:t>
+            </a:r>
+            <a:r>
+              <a:rPr lang="en-US" sz="2400" b="1" i="1" dirty="0">
+                <a:solidFill>
+                  <a:schemeClr val="accent6">
+                    <a:lumMod val="60000"/>
+                    <a:lumOff val="40000"/>
+                  </a:schemeClr>
+                </a:solidFill>
+              </a:rPr>
+              <a:t>Thought</a:t>
+            </a:r>
+            <a:r>
+              <a:rPr lang="en-US" sz="2400" dirty="0">
+                <a:solidFill>
+                  <a:schemeClr val="accent6">
+                    <a:lumMod val="60000"/>
+                    <a:lumOff val="40000"/>
+                  </a:schemeClr>
+                </a:solidFill>
+              </a:rPr>
+              <a:t>), take an </a:t>
+            </a:r>
+            <a:r>
+              <a:rPr lang="en-US" sz="2400" b="1" i="1" dirty="0">
+                <a:solidFill>
+                  <a:schemeClr val="accent6">
+                    <a:lumMod val="60000"/>
+                    <a:lumOff val="40000"/>
+                  </a:schemeClr>
+                </a:solidFill>
+              </a:rPr>
+              <a:t>action</a:t>
+            </a:r>
+            <a:r>
+              <a:rPr lang="en-US" sz="2400" dirty="0">
+                <a:solidFill>
+                  <a:schemeClr val="accent6">
+                    <a:lumMod val="60000"/>
+                    <a:lumOff val="40000"/>
+                  </a:schemeClr>
+                </a:solidFill>
+              </a:rPr>
+              <a:t> (like</a:t>
+            </a:r>
+          </a:p>
+          <a:p>
+            <a:r>
+              <a:rPr lang="en-US" sz="2400" dirty="0">
+                <a:solidFill>
+                  <a:schemeClr val="accent6">
+                    <a:lumMod val="60000"/>
+                    <a:lumOff val="40000"/>
+                  </a:schemeClr>
+                </a:solidFill>
+              </a:rPr>
+              <a:t>checking flight data or filtering results), </a:t>
+            </a:r>
+            <a:r>
+              <a:rPr lang="en-US" sz="2400" b="1" i="1" dirty="0">
+                <a:solidFill>
+                  <a:schemeClr val="accent6">
+                    <a:lumMod val="60000"/>
+                    <a:lumOff val="40000"/>
+                  </a:schemeClr>
+                </a:solidFill>
+              </a:rPr>
+              <a:t>observe</a:t>
+            </a:r>
+            <a:r>
+              <a:rPr lang="en-US" sz="2400" dirty="0">
+                <a:solidFill>
+                  <a:schemeClr val="accent6">
+                    <a:lumMod val="60000"/>
+                    <a:lumOff val="40000"/>
+                  </a:schemeClr>
+                </a:solidFill>
+              </a:rPr>
+              <a:t> your findings, and</a:t>
+            </a:r>
+          </a:p>
+          <a:p>
+            <a:r>
+              <a:rPr lang="en-US" sz="2400" dirty="0">
+                <a:solidFill>
+                  <a:schemeClr val="accent6">
+                    <a:lumMod val="60000"/>
+                    <a:lumOff val="40000"/>
+                  </a:schemeClr>
+                </a:solidFill>
+              </a:rPr>
+              <a:t>continue until the final answer.</a:t>
+            </a:r>
+          </a:p>
+          <a:p>
+            <a:endParaRPr lang="en-US" sz="2400" dirty="0">
+              <a:solidFill>
+                <a:schemeClr val="accent6">
+                  <a:lumMod val="60000"/>
+                  <a:lumOff val="40000"/>
+                </a:schemeClr>
+              </a:solidFill>
+            </a:endParaRPr>
+          </a:p>
+          <a:p>
+            <a:r>
+              <a:rPr lang="en-US" sz="2400" dirty="0">
+                <a:solidFill>
+                  <a:schemeClr val="accent6">
+                    <a:lumMod val="60000"/>
+                    <a:lumOff val="40000"/>
+                  </a:schemeClr>
+                </a:solidFill>
+              </a:rPr>
+              <a:t>Task: Find the cheapest non-stop flight from New Delhi to Tokyo</a:t>
+            </a:r>
+          </a:p>
+          <a:p>
+            <a:r>
+              <a:rPr lang="en-US" sz="2400" dirty="0">
+                <a:solidFill>
+                  <a:schemeClr val="accent6">
+                    <a:lumMod val="60000"/>
+                    <a:lumOff val="40000"/>
+                  </a:schemeClr>
+                </a:solidFill>
+              </a:rPr>
+              <a:t>next weekend, and summarize your reasoning.</a:t>
+            </a:r>
+          </a:p>
+          <a:p>
+            <a:endParaRPr lang="en-US" sz="2400" dirty="0">
+              <a:solidFill>
+                <a:schemeClr val="accent6">
+                  <a:lumMod val="60000"/>
+                  <a:lumOff val="40000"/>
+                </a:schemeClr>
+              </a:solidFill>
+            </a:endParaRPr>
+          </a:p>
+          <a:p>
+            <a:r>
+              <a:rPr lang="en-US" sz="2400" dirty="0">
+                <a:solidFill>
+                  <a:schemeClr val="accent6">
+                    <a:lumMod val="60000"/>
+                    <a:lumOff val="40000"/>
+                  </a:schemeClr>
+                </a:solidFill>
+              </a:rPr>
+              <a:t>Use this format:</a:t>
+            </a:r>
+          </a:p>
+          <a:p>
+            <a:r>
+              <a:rPr lang="en-US" sz="2400" b="1" i="1" dirty="0">
+                <a:solidFill>
+                  <a:schemeClr val="accent6">
+                    <a:lumMod val="60000"/>
+                    <a:lumOff val="40000"/>
+                  </a:schemeClr>
+                </a:solidFill>
+              </a:rPr>
+              <a:t>Thought:</a:t>
+            </a:r>
+          </a:p>
+          <a:p>
+            <a:r>
+              <a:rPr lang="en-US" sz="2400" b="1" i="1" dirty="0">
+                <a:solidFill>
+                  <a:schemeClr val="accent6">
+                    <a:lumMod val="60000"/>
+                    <a:lumOff val="40000"/>
+                  </a:schemeClr>
+                </a:solidFill>
+              </a:rPr>
+              <a:t>Action:</a:t>
+            </a:r>
+          </a:p>
+          <a:p>
+            <a:r>
+              <a:rPr lang="en-US" sz="2400" b="1" i="1" dirty="0">
+                <a:solidFill>
+                  <a:schemeClr val="accent6">
+                    <a:lumMod val="60000"/>
+                    <a:lumOff val="40000"/>
+                  </a:schemeClr>
+                </a:solidFill>
+              </a:rPr>
+              <a:t>Observation:</a:t>
+            </a:r>
+          </a:p>
+          <a:p>
+            <a:r>
+              <a:rPr lang="en-US" sz="2400" b="1" i="1" dirty="0">
+                <a:solidFill>
+                  <a:schemeClr val="accent6">
+                    <a:lumMod val="60000"/>
+                    <a:lumOff val="40000"/>
+                  </a:schemeClr>
+                </a:solidFill>
+              </a:rPr>
+              <a:t>Final Answer:</a:t>
+            </a:r>
+          </a:p>
+        </p:txBody>
+      </p:sp>
+      <p:sp>
+        <p:nvSpPr>
+          <p:cNvPr id="4" name="TextBox 3">
+            <a:extLst>
+              <a:ext uri="{FF2B5EF4-FFF2-40B4-BE49-F238E27FC236}">
+                <a16:creationId xmlns:a16="http://schemas.microsoft.com/office/drawing/2014/main" id="{F35F080C-F5A5-A929-96ED-EFEC1FE7B173}"/>
+              </a:ext>
+            </a:extLst>
+          </p:cNvPr>
+          <p:cNvSpPr txBox="1"/>
+          <p:nvPr/>
+        </p:nvSpPr>
+        <p:spPr>
+          <a:xfrm>
+            <a:off x="1897380" y="208080"/>
+            <a:ext cx="6190488" cy="461665"/>
+          </a:xfrm>
+          <a:prstGeom prst="rect">
+            <a:avLst/>
+          </a:prstGeom>
+          <a:noFill/>
+        </p:spPr>
+        <p:txBody>
+          <a:bodyPr wrap="square">
+            <a:spAutoFit/>
+          </a:bodyPr>
+          <a:lstStyle/>
+          <a:p>
+            <a:r>
+              <a:rPr lang="en-US" sz="2400" b="1" dirty="0">
+                <a:solidFill>
+                  <a:schemeClr val="accent6">
+                    <a:lumMod val="60000"/>
+                    <a:lumOff val="40000"/>
+                  </a:schemeClr>
+                </a:solidFill>
+              </a:rPr>
+              <a:t>Example: An agent style query</a:t>
+            </a:r>
+          </a:p>
+        </p:txBody>
+      </p:sp>
+    </p:spTree>
+    <p:extLst>
+      <p:ext uri="{BB962C8B-B14F-4D97-AF65-F5344CB8AC3E}">
+        <p14:creationId xmlns:p14="http://schemas.microsoft.com/office/powerpoint/2010/main" val="405574129"/>
+      </p:ext>
+    </p:extLst>
+  </p:cSld>
+  <p:clrMapOvr>
+    <a:masterClrMapping/>
+  </p:clrMapOvr>
+</p:sld>
+</file>
+
+<file path=ppt/slides/slide11.xml><?xml version="1.0" encoding="utf-8"?>
+<p:sld xmlns:a="http://schemas.openxmlformats.org/drawingml/2006/main" xmlns:r="http://schemas.openxmlformats.org/officeDocument/2006/relationships" xmlns:p="http://schemas.openxmlformats.org/presentationml/2006/main">
+  <p:cSld>
+    <p:spTree>
+      <p:nvGrpSpPr>
+        <p:cNvPr id="1" name="">
+          <a:extLst>
+            <a:ext uri="{FF2B5EF4-FFF2-40B4-BE49-F238E27FC236}">
+              <a16:creationId xmlns:a16="http://schemas.microsoft.com/office/drawing/2014/main" id="{3617235A-49EF-AA72-F62F-4A3167F4D19A}"/>
+            </a:ext>
+          </a:extLst>
+        </p:cNvPr>
+        <p:cNvGrpSpPr/>
+        <p:nvPr/>
+      </p:nvGrpSpPr>
+      <p:grpSpPr>
+        <a:xfrm>
+          <a:off x="0" y="0"/>
+          <a:ext cx="0" cy="0"/>
+          <a:chOff x="0" y="0"/>
+          <a:chExt cx="0" cy="0"/>
+        </a:xfrm>
+      </p:grpSpPr>
+      <p:sp>
+        <p:nvSpPr>
+          <p:cNvPr id="8" name="TextBox 7">
+            <a:extLst>
+              <a:ext uri="{FF2B5EF4-FFF2-40B4-BE49-F238E27FC236}">
+                <a16:creationId xmlns:a16="http://schemas.microsoft.com/office/drawing/2014/main" id="{A4FBBBB2-7421-A789-4AD6-3CCA4474E133}"/>
+              </a:ext>
+            </a:extLst>
+          </p:cNvPr>
+          <p:cNvSpPr txBox="1"/>
+          <p:nvPr/>
+        </p:nvSpPr>
+        <p:spPr>
+          <a:xfrm>
+            <a:off x="379476" y="1335024"/>
+            <a:ext cx="2034540" cy="830997"/>
+          </a:xfrm>
+          <a:prstGeom prst="rect">
+            <a:avLst/>
+          </a:prstGeom>
+          <a:noFill/>
+        </p:spPr>
+        <p:txBody>
+          <a:bodyPr wrap="square">
+            <a:spAutoFit/>
+          </a:bodyPr>
+          <a:lstStyle/>
+          <a:p>
+            <a:r>
+              <a:rPr lang="en-US" sz="2400" b="1" dirty="0">
+                <a:solidFill>
+                  <a:schemeClr val="accent6">
+                    <a:lumMod val="60000"/>
+                    <a:lumOff val="40000"/>
+                  </a:schemeClr>
+                </a:solidFill>
+              </a:rPr>
+              <a:t>Output from </a:t>
+            </a:r>
+            <a:r>
+              <a:rPr lang="en-US" sz="2400" b="1" dirty="0" err="1">
+                <a:solidFill>
+                  <a:schemeClr val="accent6">
+                    <a:lumMod val="60000"/>
+                    <a:lumOff val="40000"/>
+                  </a:schemeClr>
+                </a:solidFill>
+              </a:rPr>
+              <a:t>chatGPT</a:t>
+            </a:r>
+            <a:endParaRPr lang="en-US" sz="2400" b="1" dirty="0">
+              <a:solidFill>
+                <a:schemeClr val="accent6">
+                  <a:lumMod val="60000"/>
+                  <a:lumOff val="40000"/>
+                </a:schemeClr>
+              </a:solidFill>
+            </a:endParaRPr>
+          </a:p>
+        </p:txBody>
+      </p:sp>
+      <p:pic>
+        <p:nvPicPr>
+          <p:cNvPr id="3" name="Picture 2">
+            <a:extLst>
+              <a:ext uri="{FF2B5EF4-FFF2-40B4-BE49-F238E27FC236}">
+                <a16:creationId xmlns:a16="http://schemas.microsoft.com/office/drawing/2014/main" id="{74D8F5BB-2EC5-60A1-339C-AD8B43AD037B}"/>
+              </a:ext>
+            </a:extLst>
+          </p:cNvPr>
+          <p:cNvPicPr>
+            <a:picLocks noChangeAspect="1"/>
+          </p:cNvPicPr>
+          <p:nvPr/>
+        </p:nvPicPr>
+        <p:blipFill>
+          <a:blip r:embed="rId2"/>
+          <a:stretch>
+            <a:fillRect/>
+          </a:stretch>
+        </p:blipFill>
+        <p:spPr>
+          <a:xfrm>
+            <a:off x="4965192" y="508743"/>
+            <a:ext cx="5307115" cy="3972924"/>
+          </a:xfrm>
+          <a:prstGeom prst="rect">
+            <a:avLst/>
+          </a:prstGeom>
+        </p:spPr>
+      </p:pic>
+    </p:spTree>
+    <p:extLst>
+      <p:ext uri="{BB962C8B-B14F-4D97-AF65-F5344CB8AC3E}">
+        <p14:creationId xmlns:p14="http://schemas.microsoft.com/office/powerpoint/2010/main" val="2230978604"/>
+      </p:ext>
+    </p:extLst>
+  </p:cSld>
+  <p:clrMapOvr>
+    <a:masterClrMapping/>
+  </p:clrMapOvr>
+</p:sld>
+</file>
+
+<file path=ppt/slides/slide12.xml><?xml version="1.0" encoding="utf-8"?>
+<p:sld xmlns:a="http://schemas.openxmlformats.org/drawingml/2006/main" xmlns:r="http://schemas.openxmlformats.org/officeDocument/2006/relationships" xmlns:p="http://schemas.openxmlformats.org/presentationml/2006/main">
+  <p:cSld>
+    <p:spTree>
+      <p:nvGrpSpPr>
+        <p:cNvPr id="1" name="">
+          <a:extLst>
+            <a:ext uri="{FF2B5EF4-FFF2-40B4-BE49-F238E27FC236}">
+              <a16:creationId xmlns:a16="http://schemas.microsoft.com/office/drawing/2014/main" id="{E8E0CD6C-C45C-ED87-A37E-33105FB17932}"/>
+            </a:ext>
+          </a:extLst>
+        </p:cNvPr>
+        <p:cNvGrpSpPr/>
+        <p:nvPr/>
+      </p:nvGrpSpPr>
+      <p:grpSpPr>
+        <a:xfrm>
+          <a:off x="0" y="0"/>
+          <a:ext cx="0" cy="0"/>
+          <a:chOff x="0" y="0"/>
+          <a:chExt cx="0" cy="0"/>
+        </a:xfrm>
+      </p:grpSpPr>
+      <p:pic>
+        <p:nvPicPr>
+          <p:cNvPr id="4" name="Picture 3">
+            <a:extLst>
+              <a:ext uri="{FF2B5EF4-FFF2-40B4-BE49-F238E27FC236}">
+                <a16:creationId xmlns:a16="http://schemas.microsoft.com/office/drawing/2014/main" id="{8AF7A162-ADAB-FC27-297C-FB47CFA86E86}"/>
+              </a:ext>
+            </a:extLst>
+          </p:cNvPr>
+          <p:cNvPicPr>
+            <a:picLocks noChangeAspect="1"/>
+          </p:cNvPicPr>
+          <p:nvPr/>
+        </p:nvPicPr>
+        <p:blipFill>
+          <a:blip r:embed="rId2"/>
+          <a:stretch>
+            <a:fillRect/>
+          </a:stretch>
+        </p:blipFill>
+        <p:spPr>
+          <a:xfrm>
+            <a:off x="2058225" y="109728"/>
+            <a:ext cx="8786951" cy="6468735"/>
+          </a:xfrm>
+          <a:prstGeom prst="rect">
+            <a:avLst/>
+          </a:prstGeom>
+        </p:spPr>
+      </p:pic>
+      <p:sp>
+        <p:nvSpPr>
+          <p:cNvPr id="6" name="TextBox 5">
+            <a:extLst>
+              <a:ext uri="{FF2B5EF4-FFF2-40B4-BE49-F238E27FC236}">
+                <a16:creationId xmlns:a16="http://schemas.microsoft.com/office/drawing/2014/main" id="{123468B6-D055-D5BB-F660-CA7CB615A807}"/>
+              </a:ext>
+            </a:extLst>
+          </p:cNvPr>
+          <p:cNvSpPr txBox="1"/>
+          <p:nvPr/>
+        </p:nvSpPr>
+        <p:spPr>
+          <a:xfrm>
+            <a:off x="379476" y="1335024"/>
+            <a:ext cx="2034540" cy="830997"/>
+          </a:xfrm>
+          <a:prstGeom prst="rect">
+            <a:avLst/>
+          </a:prstGeom>
+          <a:noFill/>
+        </p:spPr>
+        <p:txBody>
+          <a:bodyPr wrap="square">
+            <a:spAutoFit/>
+          </a:bodyPr>
+          <a:lstStyle/>
+          <a:p>
+            <a:r>
+              <a:rPr lang="en-US" sz="2400" b="1" dirty="0">
+                <a:solidFill>
+                  <a:schemeClr val="accent6">
+                    <a:lumMod val="60000"/>
+                    <a:lumOff val="40000"/>
+                  </a:schemeClr>
+                </a:solidFill>
+              </a:rPr>
+              <a:t>Output from </a:t>
+            </a:r>
+            <a:r>
+              <a:rPr lang="en-US" sz="2400" b="1" dirty="0" err="1">
+                <a:solidFill>
+                  <a:schemeClr val="accent6">
+                    <a:lumMod val="60000"/>
+                    <a:lumOff val="40000"/>
+                  </a:schemeClr>
+                </a:solidFill>
+              </a:rPr>
+              <a:t>chatGPT</a:t>
+            </a:r>
+            <a:endParaRPr lang="en-US" sz="2400" b="1" dirty="0">
+              <a:solidFill>
+                <a:schemeClr val="accent6">
+                  <a:lumMod val="60000"/>
+                  <a:lumOff val="40000"/>
+                </a:schemeClr>
+              </a:solidFill>
+            </a:endParaRPr>
+          </a:p>
+        </p:txBody>
+      </p:sp>
+    </p:spTree>
+    <p:extLst>
+      <p:ext uri="{BB962C8B-B14F-4D97-AF65-F5344CB8AC3E}">
+        <p14:creationId xmlns:p14="http://schemas.microsoft.com/office/powerpoint/2010/main" val="1260397835"/>
+      </p:ext>
+    </p:extLst>
+  </p:cSld>
+  <p:clrMapOvr>
+    <a:masterClrMapping/>
+  </p:clrMapOvr>
+</p:sld>
+</file>
+
+<file path=ppt/slides/slide13.xml><?xml version="1.0" encoding="utf-8"?>
+<p:sld xmlns:a="http://schemas.openxmlformats.org/drawingml/2006/main" xmlns:r="http://schemas.openxmlformats.org/officeDocument/2006/relationships" xmlns:p="http://schemas.openxmlformats.org/presentationml/2006/main">
+  <p:cSld>
+    <p:spTree>
+      <p:nvGrpSpPr>
+        <p:cNvPr id="1" name="">
+          <a:extLst>
+            <a:ext uri="{FF2B5EF4-FFF2-40B4-BE49-F238E27FC236}">
+              <a16:creationId xmlns:a16="http://schemas.microsoft.com/office/drawing/2014/main" id="{61198F51-F66B-E004-D0B2-45D66933DE62}"/>
+            </a:ext>
+          </a:extLst>
+        </p:cNvPr>
+        <p:cNvGrpSpPr/>
+        <p:nvPr/>
+      </p:nvGrpSpPr>
+      <p:grpSpPr>
+        <a:xfrm>
+          <a:off x="0" y="0"/>
+          <a:ext cx="0" cy="0"/>
+          <a:chOff x="0" y="0"/>
+          <a:chExt cx="0" cy="0"/>
+        </a:xfrm>
+      </p:grpSpPr>
+    </p:spTree>
+    <p:extLst>
+      <p:ext uri="{BB962C8B-B14F-4D97-AF65-F5344CB8AC3E}">
+        <p14:creationId xmlns:p14="http://schemas.microsoft.com/office/powerpoint/2010/main" val="3385151913"/>
+      </p:ext>
+    </p:extLst>
+  </p:cSld>
+  <p:clrMapOvr>
+    <a:masterClrMapping/>
+  </p:clrMapOvr>
+</p:sld>
+</file>
+
 <file path=ppt/slides/slide2.xml><?xml version="1.0" encoding="utf-8"?>
 <p:sld xmlns:a="http://schemas.openxmlformats.org/drawingml/2006/main" xmlns:r="http://schemas.openxmlformats.org/officeDocument/2006/relationships" xmlns:p="http://schemas.openxmlformats.org/presentationml/2006/main">
   <p:cSld>
@@ -3786,8 +4455,8 @@
         </p:nvSpPr>
         <p:spPr>
           <a:xfrm>
-            <a:off x="731520" y="428179"/>
-            <a:ext cx="10287000" cy="4154984"/>
+            <a:off x="220218" y="110215"/>
+            <a:ext cx="8009382" cy="1569660"/>
           </a:xfrm>
           <a:prstGeom prst="rect">
             <a:avLst/>
@@ -3875,8 +4544,25 @@
                 </a:solidFill>
                 <a:effectLst/>
               </a:rPr>
-              <a:t> = Reasoning + Acting</a:t>
-            </a:r>
+              <a:t> = Reasoning + Acting – </a:t>
+            </a:r>
+            <a:r>
+              <a:rPr lang="en-US" sz="2400" dirty="0">
+                <a:solidFill>
+                  <a:schemeClr val="accent6">
+                    <a:lumMod val="60000"/>
+                    <a:lumOff val="40000"/>
+                  </a:schemeClr>
+                </a:solidFill>
+                <a:effectLst/>
+              </a:rPr>
+              <a:t>Mainly used by AI Agents</a:t>
+            </a:r>
+          </a:p>
+          <a:p>
+            <a:pPr marL="0" marR="0" rtl="0">
+              <a:buNone/>
+            </a:pPr>
             <a:endParaRPr lang="en-US" sz="2400" dirty="0">
               <a:solidFill>
                 <a:schemeClr val="accent6">
@@ -3903,36 +4589,6 @@
               </a:rPr>
               <a:t>It is a method where an AI:</a:t>
             </a:r>
-          </a:p>
-          <a:p>
-            <a:pPr marL="742950" lvl="1" indent="-285750" rtl="0" fontAlgn="ctr">
-              <a:buFont typeface="+mj-lt"/>
-              <a:buAutoNum type="arabicPeriod"/>
-            </a:pPr>
-            <a:r>
-              <a:rPr lang="en-US" sz="2400" b="1" i="0" dirty="0">
-                <a:solidFill>
-                  <a:schemeClr val="accent6">
-                    <a:lumMod val="60000"/>
-                    <a:lumOff val="40000"/>
-                  </a:schemeClr>
-                </a:solidFill>
-                <a:effectLst/>
-              </a:rPr>
-              <a:t>Thinks (Reasoning)</a:t>
-            </a:r>
-            <a:r>
-              <a:rPr lang="en-US" sz="2400" b="0" i="0" dirty="0">
-                <a:solidFill>
-                  <a:schemeClr val="accent6">
-                    <a:lumMod val="60000"/>
-                    <a:lumOff val="40000"/>
-                  </a:schemeClr>
-                </a:solidFill>
-                <a:effectLst/>
-              </a:rPr>
-              <a:t> → breaks down the problem step-by-step </a:t>
-            </a:r>
             <a:endParaRPr lang="en-US" sz="2400" b="1" i="0" dirty="0">
               <a:solidFill>
                 <a:schemeClr val="accent6">
@@ -3943,84 +4599,283 @@
               <a:effectLst/>
             </a:endParaRPr>
           </a:p>
-          <a:p>
-            <a:pPr marL="742950" lvl="1" indent="-285750" rtl="0" fontAlgn="ctr">
+        </p:txBody>
+      </p:sp>
+      <p:sp>
+        <p:nvSpPr>
+          <p:cNvPr id="2" name="Rectangle: Rounded Corners 1">
+            <a:extLst>
+              <a:ext uri="{FF2B5EF4-FFF2-40B4-BE49-F238E27FC236}">
+                <a16:creationId xmlns:a16="http://schemas.microsoft.com/office/drawing/2014/main" id="{22099C8E-5B9A-4C31-29DB-A245DBE84C9F}"/>
+              </a:ext>
+            </a:extLst>
+          </p:cNvPr>
+          <p:cNvSpPr/>
+          <p:nvPr/>
+        </p:nvSpPr>
+        <p:spPr>
+          <a:xfrm>
+            <a:off x="3499104" y="1578335"/>
+            <a:ext cx="3470148" cy="1430910"/>
+          </a:xfrm>
+          <a:prstGeom prst="roundRect">
+            <a:avLst/>
+          </a:prstGeom>
+        </p:spPr>
+        <p:style>
+          <a:lnRef idx="2">
+            <a:schemeClr val="accent1">
+              <a:shade val="15000"/>
+            </a:schemeClr>
+          </a:lnRef>
+          <a:fillRef idx="1">
+            <a:schemeClr val="accent1"/>
+          </a:fillRef>
+          <a:effectRef idx="0">
+            <a:schemeClr val="accent1"/>
+          </a:effectRef>
+          <a:fontRef idx="minor">
+            <a:schemeClr val="lt1"/>
+          </a:fontRef>
+        </p:style>
+        <p:txBody>
+          <a:bodyPr rtlCol="0" anchor="ctr"/>
+          <a:lstStyle/>
+          <a:p>
+            <a:pPr marL="742950" lvl="1" indent="-285750" fontAlgn="ctr">
               <a:buFont typeface="+mj-lt"/>
               <a:buAutoNum type="arabicPeriod"/>
             </a:pPr>
             <a:r>
-              <a:rPr lang="en-US" sz="2400" b="1" i="0" dirty="0">
-                <a:solidFill>
-                  <a:schemeClr val="accent6">
-                    <a:lumMod val="60000"/>
-                    <a:lumOff val="40000"/>
-                  </a:schemeClr>
-                </a:solidFill>
-                <a:effectLst/>
-              </a:rPr>
-              <a:t>Acts (Action)</a:t>
-            </a:r>
-            <a:r>
-              <a:rPr lang="en-US" sz="2400" b="0" i="0" dirty="0">
-                <a:solidFill>
-                  <a:schemeClr val="accent6">
-                    <a:lumMod val="60000"/>
-                    <a:lumOff val="40000"/>
-                  </a:schemeClr>
-                </a:solidFill>
-                <a:effectLst/>
-              </a:rPr>
-              <a:t> → uses tools, searches, calculations, or decisions </a:t>
-            </a:r>
-            <a:endParaRPr lang="en-US" sz="2400" b="1" i="0" dirty="0">
+              <a:rPr lang="en-US" sz="2400" b="1" dirty="0">
+                <a:solidFill>
+                  <a:schemeClr val="bg1">
+                    <a:lumMod val="95000"/>
+                  </a:schemeClr>
+                </a:solidFill>
+              </a:rPr>
+              <a:t>Thinks (Reasoning)</a:t>
+            </a:r>
+          </a:p>
+          <a:p>
+            <a:pPr lvl="1" fontAlgn="ctr"/>
+            <a:r>
+              <a:rPr lang="en-US" sz="2400" dirty="0">
+                <a:solidFill>
+                  <a:schemeClr val="bg1">
+                    <a:lumMod val="95000"/>
+                  </a:schemeClr>
+                </a:solidFill>
+              </a:rPr>
+              <a:t>Breaks down the problem step-by-step </a:t>
+            </a:r>
+            <a:endParaRPr lang="en-US" sz="2400" b="1" dirty="0">
               <a:solidFill>
-                <a:schemeClr val="accent6">
-                  <a:lumMod val="60000"/>
-                  <a:lumOff val="40000"/>
+                <a:schemeClr val="bg1">
+                  <a:lumMod val="95000"/>
                 </a:schemeClr>
               </a:solidFill>
-              <a:effectLst/>
             </a:endParaRPr>
           </a:p>
-          <a:p>
-            <a:pPr marL="742950" lvl="1" indent="-285750" rtl="0" fontAlgn="ctr">
-              <a:buFont typeface="+mj-lt"/>
-              <a:buAutoNum type="arabicPeriod"/>
-            </a:pPr>
-            <a:r>
-              <a:rPr lang="en-US" sz="2400" b="1" i="0" dirty="0">
-                <a:solidFill>
-                  <a:schemeClr val="accent6">
-                    <a:lumMod val="60000"/>
-                    <a:lumOff val="40000"/>
-                  </a:schemeClr>
-                </a:solidFill>
-                <a:effectLst/>
-              </a:rPr>
-              <a:t>Observes results</a:t>
-            </a:r>
-            <a:r>
-              <a:rPr lang="en-US" sz="2400" b="0" i="0" dirty="0">
-                <a:solidFill>
-                  <a:schemeClr val="accent6">
-                    <a:lumMod val="60000"/>
-                    <a:lumOff val="40000"/>
-                  </a:schemeClr>
-                </a:solidFill>
-                <a:effectLst/>
-              </a:rPr>
-              <a:t> → then continues reasoning </a:t>
-            </a:r>
-            <a:endParaRPr lang="en-US" sz="2400" b="1" i="0" dirty="0">
+        </p:txBody>
+      </p:sp>
+      <p:sp>
+        <p:nvSpPr>
+          <p:cNvPr id="5" name="Rectangle: Rounded Corners 4">
+            <a:extLst>
+              <a:ext uri="{FF2B5EF4-FFF2-40B4-BE49-F238E27FC236}">
+                <a16:creationId xmlns:a16="http://schemas.microsoft.com/office/drawing/2014/main" id="{94F90B82-41B6-0A96-17CB-E349E7AA5383}"/>
+              </a:ext>
+            </a:extLst>
+          </p:cNvPr>
+          <p:cNvSpPr/>
+          <p:nvPr/>
+        </p:nvSpPr>
+        <p:spPr>
+          <a:xfrm>
+            <a:off x="7815072" y="1578336"/>
+            <a:ext cx="4005072" cy="1382994"/>
+          </a:xfrm>
+          <a:prstGeom prst="roundRect">
+            <a:avLst/>
+          </a:prstGeom>
+        </p:spPr>
+        <p:style>
+          <a:lnRef idx="2">
+            <a:schemeClr val="accent1">
+              <a:shade val="15000"/>
+            </a:schemeClr>
+          </a:lnRef>
+          <a:fillRef idx="1">
+            <a:schemeClr val="accent1"/>
+          </a:fillRef>
+          <a:effectRef idx="0">
+            <a:schemeClr val="accent1"/>
+          </a:effectRef>
+          <a:fontRef idx="minor">
+            <a:schemeClr val="lt1"/>
+          </a:fontRef>
+        </p:style>
+        <p:txBody>
+          <a:bodyPr rtlCol="0" anchor="ctr"/>
+          <a:lstStyle/>
+          <a:p>
+            <a:pPr lvl="1" fontAlgn="ctr"/>
+            <a:r>
+              <a:rPr lang="en-US" sz="2400" b="1" dirty="0">
+                <a:solidFill>
+                  <a:schemeClr val="bg1">
+                    <a:lumMod val="95000"/>
+                  </a:schemeClr>
+                </a:solidFill>
+              </a:rPr>
+              <a:t>2. Acts (Action)</a:t>
+            </a:r>
+            <a:r>
+              <a:rPr lang="en-US" sz="2400" dirty="0">
+                <a:solidFill>
+                  <a:schemeClr val="bg1">
+                    <a:lumMod val="95000"/>
+                  </a:schemeClr>
+                </a:solidFill>
+              </a:rPr>
+              <a:t> </a:t>
+            </a:r>
+          </a:p>
+          <a:p>
+            <a:pPr lvl="1" fontAlgn="ctr"/>
+            <a:r>
+              <a:rPr lang="en-US" sz="2400" dirty="0">
+                <a:solidFill>
+                  <a:schemeClr val="bg1">
+                    <a:lumMod val="95000"/>
+                  </a:schemeClr>
+                </a:solidFill>
+              </a:rPr>
+              <a:t>Uses tools, searches, calculations, or decisions </a:t>
+            </a:r>
+            <a:endParaRPr lang="en-US" sz="2400" b="1" dirty="0">
               <a:solidFill>
-                <a:schemeClr val="accent6">
-                  <a:lumMod val="60000"/>
-                  <a:lumOff val="40000"/>
+                <a:schemeClr val="bg1">
+                  <a:lumMod val="95000"/>
                 </a:schemeClr>
               </a:solidFill>
-              <a:effectLst/>
             </a:endParaRPr>
           </a:p>
+        </p:txBody>
+      </p:sp>
+      <p:sp>
+        <p:nvSpPr>
+          <p:cNvPr id="7" name="Rectangle: Rounded Corners 6">
+            <a:extLst>
+              <a:ext uri="{FF2B5EF4-FFF2-40B4-BE49-F238E27FC236}">
+                <a16:creationId xmlns:a16="http://schemas.microsoft.com/office/drawing/2014/main" id="{0C4E1642-4C2F-CE3B-C3FE-434DF60A70B6}"/>
+              </a:ext>
+            </a:extLst>
+          </p:cNvPr>
+          <p:cNvSpPr/>
+          <p:nvPr/>
+        </p:nvSpPr>
+        <p:spPr>
+          <a:xfrm>
+            <a:off x="5184648" y="3896671"/>
+            <a:ext cx="4306824" cy="1220343"/>
+          </a:xfrm>
+          <a:prstGeom prst="roundRect">
+            <a:avLst/>
+          </a:prstGeom>
+        </p:spPr>
+        <p:style>
+          <a:lnRef idx="2">
+            <a:schemeClr val="accent1">
+              <a:shade val="15000"/>
+            </a:schemeClr>
+          </a:lnRef>
+          <a:fillRef idx="1">
+            <a:schemeClr val="accent1"/>
+          </a:fillRef>
+          <a:effectRef idx="0">
+            <a:schemeClr val="accent1"/>
+          </a:effectRef>
+          <a:fontRef idx="minor">
+            <a:schemeClr val="lt1"/>
+          </a:fontRef>
+        </p:style>
+        <p:txBody>
+          <a:bodyPr rtlCol="0" anchor="ctr"/>
+          <a:lstStyle/>
+          <a:p>
+            <a:pPr lvl="1" fontAlgn="ctr"/>
+            <a:r>
+              <a:rPr lang="en-US" sz="2400" b="1" dirty="0">
+                <a:solidFill>
+                  <a:schemeClr val="bg1">
+                    <a:lumMod val="95000"/>
+                  </a:schemeClr>
+                </a:solidFill>
+              </a:rPr>
+              <a:t>3. Observes results</a:t>
+            </a:r>
+            <a:r>
+              <a:rPr lang="en-US" sz="2400" dirty="0">
+                <a:solidFill>
+                  <a:schemeClr val="bg1">
+                    <a:lumMod val="95000"/>
+                  </a:schemeClr>
+                </a:solidFill>
+              </a:rPr>
+              <a:t> </a:t>
+            </a:r>
+          </a:p>
+          <a:p>
+            <a:pPr lvl="1" fontAlgn="ctr"/>
+            <a:r>
+              <a:rPr lang="en-US" sz="2400" dirty="0">
+                <a:solidFill>
+                  <a:schemeClr val="bg1">
+                    <a:lumMod val="95000"/>
+                  </a:schemeClr>
+                </a:solidFill>
+              </a:rPr>
+              <a:t>Check if task is finished, else continue with reasoning </a:t>
+            </a:r>
+            <a:endParaRPr lang="en-US" sz="2400" b="1" dirty="0">
+              <a:solidFill>
+                <a:schemeClr val="bg1">
+                  <a:lumMod val="95000"/>
+                </a:schemeClr>
+              </a:solidFill>
+            </a:endParaRPr>
+          </a:p>
+        </p:txBody>
+      </p:sp>
+      <p:sp>
+        <p:nvSpPr>
+          <p:cNvPr id="9" name="TextBox 8">
+            <a:extLst>
+              <a:ext uri="{FF2B5EF4-FFF2-40B4-BE49-F238E27FC236}">
+                <a16:creationId xmlns:a16="http://schemas.microsoft.com/office/drawing/2014/main" id="{A2C30E3D-8621-B9E9-78A8-44F2DC42A479}"/>
+              </a:ext>
+            </a:extLst>
+          </p:cNvPr>
+          <p:cNvSpPr txBox="1"/>
+          <p:nvPr/>
+        </p:nvSpPr>
+        <p:spPr>
+          <a:xfrm>
+            <a:off x="371474" y="5719698"/>
+            <a:ext cx="9449181" cy="830997"/>
+          </a:xfrm>
+          <a:prstGeom prst="rect">
+            <a:avLst/>
+          </a:prstGeom>
+          <a:noFill/>
+        </p:spPr>
+        <p:txBody>
+          <a:bodyPr wrap="square">
+            <a:spAutoFit/>
+          </a:bodyPr>
+          <a:lstStyle/>
           <a:p>
             <a:pPr marL="0" marR="0" rtl="0">
               <a:buNone/>
@@ -4035,13 +4890,20 @@
                 </a:solidFill>
                 <a:effectLst/>
               </a:rPr>
-              <a:t>This makes the model behave more like a problem-solving agent instead of just generating text.</a:t>
-            </a:r>
-          </a:p>
-          <a:p>
-            <a:pPr marL="0" marR="0" rtl="0">
-              <a:buNone/>
-            </a:pPr>
+              <a:t>This makes the model behave more like a </a:t>
+            </a:r>
+            <a:r>
+              <a:rPr lang="en-US" sz="2400" b="1" i="1" dirty="0">
+                <a:solidFill>
+                  <a:schemeClr val="accent6">
+                    <a:lumMod val="60000"/>
+                    <a:lumOff val="40000"/>
+                  </a:schemeClr>
+                </a:solidFill>
+                <a:effectLst/>
+              </a:rPr>
+              <a:t>problem-solving AI Agent</a:t>
+            </a:r>
             <a:r>
               <a:rPr lang="en-US" sz="2400" dirty="0">
                 <a:solidFill>
@@ -4052,24 +4914,7 @@
                 </a:solidFill>
                 <a:effectLst/>
               </a:rPr>
-              <a:t> </a:t>
-            </a:r>
-          </a:p>
-          <a:p>
-            <a:pPr marL="0" marR="0" rtl="0">
-              <a:buNone/>
-            </a:pPr>
-            <a:r>
-              <a:rPr lang="en-US" sz="2400" b="1" dirty="0">
-                <a:solidFill>
-                  <a:schemeClr val="accent6">
-                    <a:lumMod val="60000"/>
-                    <a:lumOff val="40000"/>
-                  </a:schemeClr>
-                </a:solidFill>
-                <a:effectLst/>
-              </a:rPr>
-              <a:t>🔁 Simple Idea Flow</a:t>
+              <a:t> instead of just generating text.</a:t>
             </a:r>
             <a:endParaRPr lang="en-US" sz="2400" dirty="0">
               <a:solidFill>
@@ -4078,34 +4923,145 @@
                   <a:lumOff val="40000"/>
                 </a:schemeClr>
               </a:solidFill>
-              <a:effectLst/>
             </a:endParaRPr>
           </a:p>
-          <a:p>
-            <a:pPr marL="0" marR="0" rtl="0">
-              <a:buNone/>
-            </a:pPr>
-            <a:r>
-              <a:rPr lang="en-US" sz="2400" b="1" dirty="0">
-                <a:solidFill>
-                  <a:schemeClr val="accent6">
-                    <a:lumMod val="60000"/>
-                    <a:lumOff val="40000"/>
-                  </a:schemeClr>
-                </a:solidFill>
-                <a:effectLst/>
-              </a:rPr>
-              <a:t>Thought → Action → Observation → Thought → Action → Answer</a:t>
-            </a:r>
-            <a:endParaRPr lang="en-US" sz="2400" dirty="0">
-              <a:solidFill>
-                <a:schemeClr val="accent6">
-                  <a:lumMod val="60000"/>
-                  <a:lumOff val="40000"/>
-                </a:schemeClr>
-              </a:solidFill>
-              <a:effectLst/>
-            </a:endParaRPr>
+        </p:txBody>
+      </p:sp>
+      <p:sp>
+        <p:nvSpPr>
+          <p:cNvPr id="10" name="Arrow: Right 9">
+            <a:extLst>
+              <a:ext uri="{FF2B5EF4-FFF2-40B4-BE49-F238E27FC236}">
+                <a16:creationId xmlns:a16="http://schemas.microsoft.com/office/drawing/2014/main" id="{031DFEEB-EE6B-014B-D3CA-52AF80E42326}"/>
+              </a:ext>
+            </a:extLst>
+          </p:cNvPr>
+          <p:cNvSpPr/>
+          <p:nvPr/>
+        </p:nvSpPr>
+        <p:spPr>
+          <a:xfrm>
+            <a:off x="7050024" y="2146573"/>
+            <a:ext cx="603504" cy="466344"/>
+          </a:xfrm>
+          <a:prstGeom prst="rightArrow">
+            <a:avLst/>
+          </a:prstGeom>
+        </p:spPr>
+        <p:style>
+          <a:lnRef idx="2">
+            <a:schemeClr val="accent1">
+              <a:shade val="15000"/>
+            </a:schemeClr>
+          </a:lnRef>
+          <a:fillRef idx="1">
+            <a:schemeClr val="accent1"/>
+          </a:fillRef>
+          <a:effectRef idx="0">
+            <a:schemeClr val="accent1"/>
+          </a:effectRef>
+          <a:fontRef idx="minor">
+            <a:schemeClr val="lt1"/>
+          </a:fontRef>
+        </p:style>
+        <p:txBody>
+          <a:bodyPr rtlCol="0" anchor="ctr"/>
+          <a:lstStyle/>
+          <a:p>
+            <a:pPr algn="ctr"/>
+            <a:endParaRPr lang="en-IN"/>
+          </a:p>
+        </p:txBody>
+      </p:sp>
+      <p:sp>
+        <p:nvSpPr>
+          <p:cNvPr id="12" name="Arrow: Right 11">
+            <a:extLst>
+              <a:ext uri="{FF2B5EF4-FFF2-40B4-BE49-F238E27FC236}">
+                <a16:creationId xmlns:a16="http://schemas.microsoft.com/office/drawing/2014/main" id="{224A503F-3EDC-5817-AA7B-315592531993}"/>
+              </a:ext>
+            </a:extLst>
+          </p:cNvPr>
+          <p:cNvSpPr/>
+          <p:nvPr/>
+        </p:nvSpPr>
+        <p:spPr>
+          <a:xfrm rot="7200228">
+            <a:off x="8391144" y="3237671"/>
+            <a:ext cx="603504" cy="466344"/>
+          </a:xfrm>
+          <a:prstGeom prst="rightArrow">
+            <a:avLst/>
+          </a:prstGeom>
+        </p:spPr>
+        <p:style>
+          <a:lnRef idx="2">
+            <a:schemeClr val="accent1">
+              <a:shade val="15000"/>
+            </a:schemeClr>
+          </a:lnRef>
+          <a:fillRef idx="1">
+            <a:schemeClr val="accent1"/>
+          </a:fillRef>
+          <a:effectRef idx="0">
+            <a:schemeClr val="accent1"/>
+          </a:effectRef>
+          <a:fontRef idx="minor">
+            <a:schemeClr val="lt1"/>
+          </a:fontRef>
+        </p:style>
+        <p:txBody>
+          <a:bodyPr rtlCol="0" anchor="ctr"/>
+          <a:lstStyle/>
+          <a:p>
+            <a:pPr algn="ctr"/>
+            <a:endParaRPr lang="en-IN"/>
+          </a:p>
+        </p:txBody>
+      </p:sp>
+      <p:sp>
+        <p:nvSpPr>
+          <p:cNvPr id="14" name="Arrow: Right 13">
+            <a:extLst>
+              <a:ext uri="{FF2B5EF4-FFF2-40B4-BE49-F238E27FC236}">
+                <a16:creationId xmlns:a16="http://schemas.microsoft.com/office/drawing/2014/main" id="{D18BB33A-F9CC-35CA-C460-F339F4CA0FE4}"/>
+              </a:ext>
+            </a:extLst>
+          </p:cNvPr>
+          <p:cNvSpPr/>
+          <p:nvPr/>
+        </p:nvSpPr>
+        <p:spPr>
+          <a:xfrm rot="13644797">
+            <a:off x="5925868" y="3194797"/>
+            <a:ext cx="603504" cy="466344"/>
+          </a:xfrm>
+          <a:prstGeom prst="rightArrow">
+            <a:avLst/>
+          </a:prstGeom>
+        </p:spPr>
+        <p:style>
+          <a:lnRef idx="2">
+            <a:schemeClr val="accent1">
+              <a:shade val="15000"/>
+            </a:schemeClr>
+          </a:lnRef>
+          <a:fillRef idx="1">
+            <a:schemeClr val="accent1"/>
+          </a:fillRef>
+          <a:effectRef idx="0">
+            <a:schemeClr val="accent1"/>
+          </a:effectRef>
+          <a:fontRef idx="minor">
+            <a:schemeClr val="lt1"/>
+          </a:fontRef>
+        </p:style>
+        <p:txBody>
+          <a:bodyPr rtlCol="0" anchor="ctr"/>
+          <a:lstStyle/>
+          <a:p>
+            <a:pPr algn="ctr"/>
+            <a:endParaRPr lang="en-IN"/>
           </a:p>
         </p:txBody>
       </p:sp>
@@ -4160,7 +5116,7 @@
         <p:spPr>
           <a:xfrm>
             <a:off x="731520" y="428179"/>
-            <a:ext cx="10287000" cy="4893647"/>
+            <a:ext cx="10287000" cy="5632311"/>
           </a:xfrm>
           <a:prstGeom prst="rect">
             <a:avLst/>
@@ -4182,43 +5138,76 @@
                   </a:schemeClr>
                 </a:solidFill>
               </a:rPr>
-              <a:t>Example 1: Math Problem (No tools)</a:t>
-            </a:r>
-          </a:p>
-          <a:p>
-            <a:r>
-              <a:rPr lang="en-US" sz="2400" b="1" dirty="0">
-                <a:solidFill>
-                  <a:schemeClr val="accent6">
-                    <a:lumMod val="60000"/>
-                    <a:lumOff val="40000"/>
-                  </a:schemeClr>
-                </a:solidFill>
-              </a:rPr>
-              <a:t>Prompt (</a:t>
-            </a:r>
-            <a:r>
-              <a:rPr lang="en-US" sz="2400" b="1" dirty="0" err="1">
-                <a:solidFill>
-                  <a:schemeClr val="accent6">
-                    <a:lumMod val="60000"/>
-                    <a:lumOff val="40000"/>
-                  </a:schemeClr>
-                </a:solidFill>
-              </a:rPr>
-              <a:t>ReAct</a:t>
-            </a:r>
-            <a:r>
-              <a:rPr lang="en-US" sz="2400" b="1" dirty="0">
-                <a:solidFill>
-                  <a:schemeClr val="accent6">
-                    <a:lumMod val="60000"/>
-                    <a:lumOff val="40000"/>
-                  </a:schemeClr>
-                </a:solidFill>
-              </a:rPr>
-              <a:t> style):</a:t>
-            </a:r>
+              <a:t>Example : Math Problem (No tools)</a:t>
+            </a:r>
+          </a:p>
+          <a:p>
+            <a:endParaRPr lang="en-US" sz="2400" b="1" dirty="0">
+              <a:solidFill>
+                <a:schemeClr val="accent6">
+                  <a:lumMod val="60000"/>
+                  <a:lumOff val="40000"/>
+                </a:schemeClr>
+              </a:solidFill>
+            </a:endParaRPr>
+          </a:p>
+          <a:p>
+            <a:r>
+              <a:rPr lang="en-US" sz="2400" b="1" u="sng" dirty="0">
+                <a:solidFill>
+                  <a:schemeClr val="accent6">
+                    <a:lumMod val="60000"/>
+                    <a:lumOff val="40000"/>
+                  </a:schemeClr>
+                </a:solidFill>
+              </a:rPr>
+              <a:t>Prompt :</a:t>
+            </a:r>
+            <a:endParaRPr lang="en-US" sz="2400" u="sng" dirty="0">
+              <a:solidFill>
+                <a:schemeClr val="accent6">
+                  <a:lumMod val="60000"/>
+                  <a:lumOff val="40000"/>
+                </a:schemeClr>
+              </a:solidFill>
+            </a:endParaRPr>
+          </a:p>
+          <a:p>
+            <a:r>
+              <a:rPr lang="en-US" sz="2400" dirty="0">
+                <a:solidFill>
+                  <a:schemeClr val="accent6">
+                    <a:lumMod val="60000"/>
+                    <a:lumOff val="40000"/>
+                  </a:schemeClr>
+                </a:solidFill>
+              </a:rPr>
+              <a:t>Solve the problem step by step using Reasoning and show your </a:t>
+            </a:r>
+            <a:r>
+              <a:rPr lang="en-US" sz="2400" dirty="0" err="1">
+                <a:solidFill>
+                  <a:schemeClr val="accent6">
+                    <a:lumMod val="60000"/>
+                    <a:lumOff val="40000"/>
+                  </a:schemeClr>
+                </a:solidFill>
+              </a:rPr>
+              <a:t>ACTions</a:t>
+            </a:r>
+            <a:r>
+              <a:rPr lang="en-US" sz="2400" dirty="0">
+                <a:solidFill>
+                  <a:schemeClr val="accent6">
+                    <a:lumMod val="60000"/>
+                    <a:lumOff val="40000"/>
+                  </a:schemeClr>
+                </a:solidFill>
+              </a:rPr>
+              <a:t> clearly.</a:t>
+            </a:r>
+          </a:p>
+          <a:p>
             <a:endParaRPr lang="en-US" sz="2400" dirty="0">
               <a:solidFill>
                 <a:schemeClr val="accent6">
@@ -4238,19 +5227,10 @@
                   </a:schemeClr>
                 </a:solidFill>
               </a:rPr>
-              <a:t>Solve the problem step by step using </a:t>
-            </a:r>
-            <a:r>
-              <a:rPr lang="en-US" sz="2400" b="1" u="sng" dirty="0">
-                <a:solidFill>
-                  <a:schemeClr val="accent6">
-                    <a:lumMod val="60000"/>
-                    <a:lumOff val="40000"/>
-                  </a:schemeClr>
-                </a:solidFill>
-              </a:rPr>
-              <a:t>Re</a:t>
-            </a:r>
+              <a:t>User Question:</a:t>
+            </a:r>
+          </a:p>
+          <a:p>
             <a:r>
               <a:rPr lang="en-US" sz="2400" dirty="0">
                 <a:solidFill>
@@ -4260,30 +5240,30 @@
                   </a:schemeClr>
                 </a:solidFill>
               </a:rPr>
-              <a:t>asoning and show your </a:t>
-            </a:r>
-            <a:r>
-              <a:rPr lang="en-US" sz="2400" b="1" u="sng" dirty="0" err="1">
-                <a:solidFill>
-                  <a:schemeClr val="accent6">
-                    <a:lumMod val="60000"/>
-                    <a:lumOff val="40000"/>
-                  </a:schemeClr>
-                </a:solidFill>
-              </a:rPr>
-              <a:t>ACT</a:t>
-            </a:r>
-            <a:r>
-              <a:rPr lang="en-US" sz="2400" dirty="0" err="1">
-                <a:solidFill>
-                  <a:schemeClr val="accent6">
-                    <a:lumMod val="60000"/>
-                    <a:lumOff val="40000"/>
-                  </a:schemeClr>
-                </a:solidFill>
-              </a:rPr>
-              <a:t>ions</a:t>
-            </a:r>
+              <a:t>A shop gives 20% discount on ₹500. What is final price?</a:t>
+            </a:r>
+          </a:p>
+          <a:p>
+            <a:endParaRPr lang="en-US" sz="2400" dirty="0">
+              <a:solidFill>
+                <a:schemeClr val="accent6">
+                  <a:lumMod val="60000"/>
+                  <a:lumOff val="40000"/>
+                </a:schemeClr>
+              </a:solidFill>
+            </a:endParaRPr>
+          </a:p>
+          <a:p>
+            <a:endParaRPr lang="en-US" sz="2400" dirty="0">
+              <a:solidFill>
+                <a:schemeClr val="accent6">
+                  <a:lumMod val="60000"/>
+                  <a:lumOff val="40000"/>
+                </a:schemeClr>
+              </a:solidFill>
+            </a:endParaRPr>
+          </a:p>
+          <a:p>
             <a:r>
               <a:rPr lang="en-US" sz="2400" dirty="0">
                 <a:solidFill>
@@ -4293,10 +5273,159 @@
                   </a:schemeClr>
                 </a:solidFill>
               </a:rPr>
-              <a:t> clearly.</a:t>
-            </a:r>
-          </a:p>
-          <a:p>
+              <a:t>Use this format:</a:t>
+            </a:r>
+          </a:p>
+          <a:p>
+            <a:r>
+              <a:rPr lang="en-US" sz="2400" dirty="0">
+                <a:solidFill>
+                  <a:schemeClr val="accent6">
+                    <a:lumMod val="60000"/>
+                    <a:lumOff val="40000"/>
+                  </a:schemeClr>
+                </a:solidFill>
+              </a:rPr>
+              <a:t>Thought:</a:t>
+            </a:r>
+          </a:p>
+          <a:p>
+            <a:r>
+              <a:rPr lang="en-US" sz="2400" dirty="0">
+                <a:solidFill>
+                  <a:schemeClr val="accent6">
+                    <a:lumMod val="60000"/>
+                    <a:lumOff val="40000"/>
+                  </a:schemeClr>
+                </a:solidFill>
+              </a:rPr>
+              <a:t>Action:</a:t>
+            </a:r>
+          </a:p>
+          <a:p>
+            <a:r>
+              <a:rPr lang="en-US" sz="2400" dirty="0">
+                <a:solidFill>
+                  <a:schemeClr val="accent6">
+                    <a:lumMod val="60000"/>
+                    <a:lumOff val="40000"/>
+                  </a:schemeClr>
+                </a:solidFill>
+              </a:rPr>
+              <a:t>Observation:</a:t>
+            </a:r>
+          </a:p>
+          <a:p>
+            <a:r>
+              <a:rPr lang="en-US" sz="2400" dirty="0">
+                <a:solidFill>
+                  <a:schemeClr val="accent6">
+                    <a:lumMod val="60000"/>
+                    <a:lumOff val="40000"/>
+                  </a:schemeClr>
+                </a:solidFill>
+              </a:rPr>
+              <a:t>Final Answer:</a:t>
+            </a:r>
+          </a:p>
+          <a:p>
+            <a:endParaRPr lang="en-US" sz="2400" dirty="0">
+              <a:solidFill>
+                <a:schemeClr val="accent6">
+                  <a:lumMod val="60000"/>
+                  <a:lumOff val="40000"/>
+                </a:schemeClr>
+              </a:solidFill>
+            </a:endParaRPr>
+          </a:p>
+        </p:txBody>
+      </p:sp>
+    </p:spTree>
+    <p:extLst>
+      <p:ext uri="{BB962C8B-B14F-4D97-AF65-F5344CB8AC3E}">
+        <p14:creationId xmlns:p14="http://schemas.microsoft.com/office/powerpoint/2010/main" val="1542318831"/>
+      </p:ext>
+    </p:extLst>
+  </p:cSld>
+  <p:clrMapOvr>
+    <a:masterClrMapping/>
+  </p:clrMapOvr>
+</p:sld>
+</file>
+
+<file path=ppt/slides/slide4.xml><?xml version="1.0" encoding="utf-8"?>
+<p:sld xmlns:a="http://schemas.openxmlformats.org/drawingml/2006/main" xmlns:r="http://schemas.openxmlformats.org/officeDocument/2006/relationships" xmlns:p="http://schemas.openxmlformats.org/presentationml/2006/main">
+  <p:cSld>
+    <p:spTree>
+      <p:nvGrpSpPr>
+        <p:cNvPr id="1" name="">
+          <a:extLst>
+            <a:ext uri="{FF2B5EF4-FFF2-40B4-BE49-F238E27FC236}">
+              <a16:creationId xmlns:a16="http://schemas.microsoft.com/office/drawing/2014/main" id="{6977EDF0-4688-3A97-F726-7F61DCB87E62}"/>
+            </a:ext>
+          </a:extLst>
+        </p:cNvPr>
+        <p:cNvGrpSpPr/>
+        <p:nvPr/>
+      </p:nvGrpSpPr>
+      <p:grpSpPr>
+        <a:xfrm>
+          <a:off x="0" y="0"/>
+          <a:ext cx="0" cy="0"/>
+          <a:chOff x="0" y="0"/>
+          <a:chExt cx="0" cy="0"/>
+        </a:xfrm>
+      </p:grpSpPr>
+      <p:sp>
+        <p:nvSpPr>
+          <p:cNvPr id="8" name="TextBox 7">
+            <a:extLst>
+              <a:ext uri="{FF2B5EF4-FFF2-40B4-BE49-F238E27FC236}">
+                <a16:creationId xmlns:a16="http://schemas.microsoft.com/office/drawing/2014/main" id="{83FBF7A6-7729-94A1-81D7-276D4661782D}"/>
+              </a:ext>
+            </a:extLst>
+          </p:cNvPr>
+          <p:cNvSpPr txBox="1"/>
+          <p:nvPr/>
+        </p:nvSpPr>
+        <p:spPr>
+          <a:xfrm>
+            <a:off x="1522476" y="1225296"/>
+            <a:ext cx="2034540" cy="830997"/>
+          </a:xfrm>
+          <a:prstGeom prst="rect">
+            <a:avLst/>
+          </a:prstGeom>
+          <a:noFill/>
+        </p:spPr>
+        <p:txBody>
+          <a:bodyPr wrap="square">
+            <a:spAutoFit/>
+          </a:bodyPr>
+          <a:lstStyle/>
+          <a:p>
+            <a:r>
+              <a:rPr lang="en-US" sz="2400" b="1" dirty="0">
+                <a:solidFill>
+                  <a:schemeClr val="accent6">
+                    <a:lumMod val="60000"/>
+                    <a:lumOff val="40000"/>
+                  </a:schemeClr>
+                </a:solidFill>
+              </a:rPr>
+              <a:t>Output from </a:t>
+            </a:r>
+            <a:r>
+              <a:rPr lang="en-US" sz="2400" b="1" dirty="0" err="1">
+                <a:solidFill>
+                  <a:schemeClr val="accent6">
+                    <a:lumMod val="60000"/>
+                    <a:lumOff val="40000"/>
+                  </a:schemeClr>
+                </a:solidFill>
+              </a:rPr>
+              <a:t>chatgpt</a:t>
+            </a:r>
             <a:endParaRPr lang="en-US" sz="2400" b="1" dirty="0">
               <a:solidFill>
                 <a:schemeClr val="accent6">
@@ -4306,6 +5435,131 @@
               </a:solidFill>
             </a:endParaRPr>
           </a:p>
+        </p:txBody>
+      </p:sp>
+      <p:pic>
+        <p:nvPicPr>
+          <p:cNvPr id="4" name="Picture 3">
+            <a:extLst>
+              <a:ext uri="{FF2B5EF4-FFF2-40B4-BE49-F238E27FC236}">
+                <a16:creationId xmlns:a16="http://schemas.microsoft.com/office/drawing/2014/main" id="{CEA2B843-D946-94A4-5670-93293ECA0D5C}"/>
+              </a:ext>
+            </a:extLst>
+          </p:cNvPr>
+          <p:cNvPicPr>
+            <a:picLocks noChangeAspect="1"/>
+          </p:cNvPicPr>
+          <p:nvPr/>
+        </p:nvPicPr>
+        <p:blipFill>
+          <a:blip r:embed="rId2"/>
+          <a:stretch>
+            <a:fillRect/>
+          </a:stretch>
+        </p:blipFill>
+        <p:spPr>
+          <a:xfrm>
+            <a:off x="4291263" y="146304"/>
+            <a:ext cx="5595850" cy="3403878"/>
+          </a:xfrm>
+          <a:prstGeom prst="rect">
+            <a:avLst/>
+          </a:prstGeom>
+        </p:spPr>
+      </p:pic>
+      <p:pic>
+        <p:nvPicPr>
+          <p:cNvPr id="7" name="Picture 6">
+            <a:extLst>
+              <a:ext uri="{FF2B5EF4-FFF2-40B4-BE49-F238E27FC236}">
+                <a16:creationId xmlns:a16="http://schemas.microsoft.com/office/drawing/2014/main" id="{031A1F29-D276-4B8A-5D03-949872B230CF}"/>
+              </a:ext>
+            </a:extLst>
+          </p:cNvPr>
+          <p:cNvPicPr>
+            <a:picLocks noChangeAspect="1"/>
+          </p:cNvPicPr>
+          <p:nvPr/>
+        </p:nvPicPr>
+        <p:blipFill>
+          <a:blip r:embed="rId3"/>
+          <a:stretch>
+            <a:fillRect/>
+          </a:stretch>
+        </p:blipFill>
+        <p:spPr>
+          <a:xfrm>
+            <a:off x="1522476" y="4114800"/>
+            <a:ext cx="7979039" cy="2219825"/>
+          </a:xfrm>
+          <a:prstGeom prst="rect">
+            <a:avLst/>
+          </a:prstGeom>
+        </p:spPr>
+      </p:pic>
+    </p:spTree>
+    <p:extLst>
+      <p:ext uri="{BB962C8B-B14F-4D97-AF65-F5344CB8AC3E}">
+        <p14:creationId xmlns:p14="http://schemas.microsoft.com/office/powerpoint/2010/main" val="2951304702"/>
+      </p:ext>
+    </p:extLst>
+  </p:cSld>
+  <p:clrMapOvr>
+    <a:masterClrMapping/>
+  </p:clrMapOvr>
+</p:sld>
+</file>
+
+<file path=ppt/slides/slide5.xml><?xml version="1.0" encoding="utf-8"?>
+<p:sld xmlns:a="http://schemas.openxmlformats.org/drawingml/2006/main" xmlns:r="http://schemas.openxmlformats.org/officeDocument/2006/relationships" xmlns:p="http://schemas.openxmlformats.org/presentationml/2006/main">
+  <p:cSld>
+    <p:spTree>
+      <p:nvGrpSpPr>
+        <p:cNvPr id="1" name="">
+          <a:extLst>
+            <a:ext uri="{FF2B5EF4-FFF2-40B4-BE49-F238E27FC236}">
+              <a16:creationId xmlns:a16="http://schemas.microsoft.com/office/drawing/2014/main" id="{01548AB7-0C53-EAEF-76D1-26B8A8AAF607}"/>
+            </a:ext>
+          </a:extLst>
+        </p:cNvPr>
+        <p:cNvGrpSpPr/>
+        <p:nvPr/>
+      </p:nvGrpSpPr>
+      <p:grpSpPr>
+        <a:xfrm>
+          <a:off x="0" y="0"/>
+          <a:ext cx="0" cy="0"/>
+          <a:chOff x="0" y="0"/>
+          <a:chExt cx="0" cy="0"/>
+        </a:xfrm>
+      </p:grpSpPr>
+      <p:sp>
+        <p:nvSpPr>
+          <p:cNvPr id="4" name="TextBox 3">
+            <a:extLst>
+              <a:ext uri="{FF2B5EF4-FFF2-40B4-BE49-F238E27FC236}">
+                <a16:creationId xmlns:a16="http://schemas.microsoft.com/office/drawing/2014/main" id="{BE5AC32F-39A4-6FCB-A011-45B287CA25CE}"/>
+              </a:ext>
+            </a:extLst>
+          </p:cNvPr>
+          <p:cNvSpPr txBox="1"/>
+          <p:nvPr/>
+        </p:nvSpPr>
+        <p:spPr>
+          <a:xfrm>
+            <a:off x="301752" y="1214563"/>
+            <a:ext cx="6071615" cy="1200329"/>
+          </a:xfrm>
+          <a:prstGeom prst="rect">
+            <a:avLst/>
+          </a:prstGeom>
+          <a:noFill/>
+        </p:spPr>
+        <p:txBody>
+          <a:bodyPr wrap="square">
+            <a:spAutoFit/>
+          </a:bodyPr>
+          <a:lstStyle/>
           <a:p>
             <a:r>
               <a:rPr lang="en-US" sz="2400" b="1" dirty="0">
@@ -4316,9 +5570,37 @@
                   </a:schemeClr>
                 </a:solidFill>
               </a:rPr>
-              <a:t>User Question:</a:t>
-            </a:r>
-            <a:br>
+              <a:t>Without </a:t>
+            </a:r>
+            <a:r>
+              <a:rPr lang="en-US" sz="2400" b="1" dirty="0" err="1">
+                <a:solidFill>
+                  <a:schemeClr val="accent6">
+                    <a:lumMod val="60000"/>
+                    <a:lumOff val="40000"/>
+                  </a:schemeClr>
+                </a:solidFill>
+              </a:rPr>
+              <a:t>ReAct</a:t>
+            </a:r>
+            <a:r>
+              <a:rPr lang="en-US" sz="2400" b="1" dirty="0">
+                <a:solidFill>
+                  <a:schemeClr val="accent6">
+                    <a:lumMod val="60000"/>
+                    <a:lumOff val="40000"/>
+                  </a:schemeClr>
+                </a:solidFill>
+              </a:rPr>
+              <a:t> (Traditional Prompt):</a:t>
+            </a:r>
+          </a:p>
+          <a:p>
+            <a:pPr marL="342900" indent="-342900">
+              <a:buFont typeface="Arial" panose="020B0604020202020204" pitchFamily="34" charset="0"/>
+              <a:buChar char="•"/>
+            </a:pPr>
+            <a:r>
               <a:rPr lang="en-US" sz="2400" dirty="0">
                 <a:solidFill>
                   <a:schemeClr val="accent6">
@@ -4327,7 +5609,14 @@
                   </a:schemeClr>
                 </a:solidFill>
               </a:rPr>
-            </a:br>
+              <a:t>May Hallucination</a:t>
+            </a:r>
+          </a:p>
+          <a:p>
+            <a:pPr marL="342900" indent="-342900">
+              <a:buFont typeface="Arial" panose="020B0604020202020204" pitchFamily="34" charset="0"/>
+              <a:buChar char="•"/>
+            </a:pPr>
             <a:r>
               <a:rPr lang="en-US" sz="2400" dirty="0">
                 <a:solidFill>
@@ -4337,11 +5626,229 @@
                   </a:schemeClr>
                 </a:solidFill>
               </a:rPr>
-              <a:t>A shop gives 20% discount on ₹500. What is final price?</a:t>
-            </a:r>
-          </a:p>
-          <a:p>
-            <a:endParaRPr lang="en-US" sz="2400" b="1">
+              <a:t>Not trustworthy response</a:t>
+            </a:r>
+          </a:p>
+        </p:txBody>
+      </p:sp>
+      <p:sp>
+        <p:nvSpPr>
+          <p:cNvPr id="3" name="TextBox 2">
+            <a:extLst>
+              <a:ext uri="{FF2B5EF4-FFF2-40B4-BE49-F238E27FC236}">
+                <a16:creationId xmlns:a16="http://schemas.microsoft.com/office/drawing/2014/main" id="{A1C7D493-76B8-4797-41BC-BF7C21D37A15}"/>
+              </a:ext>
+            </a:extLst>
+          </p:cNvPr>
+          <p:cNvSpPr txBox="1"/>
+          <p:nvPr/>
+        </p:nvSpPr>
+        <p:spPr>
+          <a:xfrm>
+            <a:off x="8077200" y="1214563"/>
+            <a:ext cx="3700272" cy="1200329"/>
+          </a:xfrm>
+          <a:prstGeom prst="rect">
+            <a:avLst/>
+          </a:prstGeom>
+          <a:noFill/>
+        </p:spPr>
+        <p:txBody>
+          <a:bodyPr wrap="square">
+            <a:spAutoFit/>
+          </a:bodyPr>
+          <a:lstStyle/>
+          <a:p>
+            <a:r>
+              <a:rPr lang="en-US" sz="2400" b="1" dirty="0">
+                <a:solidFill>
+                  <a:schemeClr val="accent6">
+                    <a:lumMod val="60000"/>
+                    <a:lumOff val="40000"/>
+                  </a:schemeClr>
+                </a:solidFill>
+              </a:rPr>
+              <a:t>With </a:t>
+            </a:r>
+            <a:r>
+              <a:rPr lang="en-US" sz="2400" b="1" dirty="0" err="1">
+                <a:solidFill>
+                  <a:schemeClr val="accent6">
+                    <a:lumMod val="60000"/>
+                    <a:lumOff val="40000"/>
+                  </a:schemeClr>
+                </a:solidFill>
+              </a:rPr>
+              <a:t>ReAct</a:t>
+            </a:r>
+            <a:r>
+              <a:rPr lang="en-US" sz="2400" b="1" dirty="0">
+                <a:solidFill>
+                  <a:schemeClr val="accent6">
+                    <a:lumMod val="60000"/>
+                    <a:lumOff val="40000"/>
+                  </a:schemeClr>
+                </a:solidFill>
+              </a:rPr>
+              <a:t>:</a:t>
+            </a:r>
+          </a:p>
+          <a:p>
+            <a:pPr marL="342900" indent="-342900">
+              <a:buFont typeface="Arial" panose="020B0604020202020204" pitchFamily="34" charset="0"/>
+              <a:buChar char="•"/>
+            </a:pPr>
+            <a:r>
+              <a:rPr lang="en-US" sz="2400" dirty="0">
+                <a:solidFill>
+                  <a:schemeClr val="accent6">
+                    <a:lumMod val="60000"/>
+                    <a:lumOff val="40000"/>
+                  </a:schemeClr>
+                </a:solidFill>
+              </a:rPr>
+              <a:t>Accurate</a:t>
+            </a:r>
+          </a:p>
+          <a:p>
+            <a:pPr marL="342900" indent="-342900">
+              <a:buFont typeface="Arial" panose="020B0604020202020204" pitchFamily="34" charset="0"/>
+              <a:buChar char="•"/>
+            </a:pPr>
+            <a:r>
+              <a:rPr lang="en-US" sz="2400" dirty="0">
+                <a:solidFill>
+                  <a:schemeClr val="accent6">
+                    <a:lumMod val="60000"/>
+                    <a:lumOff val="40000"/>
+                  </a:schemeClr>
+                </a:solidFill>
+              </a:rPr>
+              <a:t>Trustworthy response</a:t>
+            </a:r>
+          </a:p>
+        </p:txBody>
+      </p:sp>
+    </p:spTree>
+    <p:extLst>
+      <p:ext uri="{BB962C8B-B14F-4D97-AF65-F5344CB8AC3E}">
+        <p14:creationId xmlns:p14="http://schemas.microsoft.com/office/powerpoint/2010/main" val="4189992885"/>
+      </p:ext>
+    </p:extLst>
+  </p:cSld>
+  <p:clrMapOvr>
+    <a:masterClrMapping/>
+  </p:clrMapOvr>
+</p:sld>
+</file>
+
+<file path=ppt/slides/slide6.xml><?xml version="1.0" encoding="utf-8"?>
+<p:sld xmlns:a="http://schemas.openxmlformats.org/drawingml/2006/main" xmlns:r="http://schemas.openxmlformats.org/officeDocument/2006/relationships" xmlns:p="http://schemas.openxmlformats.org/presentationml/2006/main">
+  <p:cSld>
+    <p:spTree>
+      <p:nvGrpSpPr>
+        <p:cNvPr id="1" name="">
+          <a:extLst>
+            <a:ext uri="{FF2B5EF4-FFF2-40B4-BE49-F238E27FC236}">
+              <a16:creationId xmlns:a16="http://schemas.microsoft.com/office/drawing/2014/main" id="{5E693D75-9063-24B1-DBE2-9F3C5770305A}"/>
+            </a:ext>
+          </a:extLst>
+        </p:cNvPr>
+        <p:cNvGrpSpPr/>
+        <p:nvPr/>
+      </p:nvGrpSpPr>
+      <p:grpSpPr>
+        <a:xfrm>
+          <a:off x="0" y="0"/>
+          <a:ext cx="0" cy="0"/>
+          <a:chOff x="0" y="0"/>
+          <a:chExt cx="0" cy="0"/>
+        </a:xfrm>
+      </p:grpSpPr>
+      <p:sp>
+        <p:nvSpPr>
+          <p:cNvPr id="8" name="TextBox 7">
+            <a:extLst>
+              <a:ext uri="{FF2B5EF4-FFF2-40B4-BE49-F238E27FC236}">
+                <a16:creationId xmlns:a16="http://schemas.microsoft.com/office/drawing/2014/main" id="{89DEF840-99C1-F908-84C0-C6B3B9944371}"/>
+              </a:ext>
+            </a:extLst>
+          </p:cNvPr>
+          <p:cNvSpPr txBox="1"/>
+          <p:nvPr/>
+        </p:nvSpPr>
+        <p:spPr>
+          <a:xfrm>
+            <a:off x="1650492" y="365760"/>
+            <a:ext cx="8182356" cy="461665"/>
+          </a:xfrm>
+          <a:prstGeom prst="rect">
+            <a:avLst/>
+          </a:prstGeom>
+          <a:noFill/>
+        </p:spPr>
+        <p:txBody>
+          <a:bodyPr wrap="square">
+            <a:spAutoFit/>
+          </a:bodyPr>
+          <a:lstStyle/>
+          <a:p>
+            <a:r>
+              <a:rPr lang="en-US" sz="2400" b="1" dirty="0">
+                <a:solidFill>
+                  <a:schemeClr val="accent6">
+                    <a:lumMod val="60000"/>
+                    <a:lumOff val="40000"/>
+                  </a:schemeClr>
+                </a:solidFill>
+              </a:rPr>
+              <a:t>Example: Research Assistant - Answering Factual Questions</a:t>
+            </a:r>
+          </a:p>
+        </p:txBody>
+      </p:sp>
+      <p:sp>
+        <p:nvSpPr>
+          <p:cNvPr id="10" name="TextBox 9">
+            <a:extLst>
+              <a:ext uri="{FF2B5EF4-FFF2-40B4-BE49-F238E27FC236}">
+                <a16:creationId xmlns:a16="http://schemas.microsoft.com/office/drawing/2014/main" id="{F6C34156-9823-A53C-69E4-4ECD8013A5AA}"/>
+              </a:ext>
+            </a:extLst>
+          </p:cNvPr>
+          <p:cNvSpPr txBox="1"/>
+          <p:nvPr/>
+        </p:nvSpPr>
+        <p:spPr>
+          <a:xfrm>
+            <a:off x="2359152" y="1140750"/>
+            <a:ext cx="8695944" cy="4893647"/>
+          </a:xfrm>
+          <a:prstGeom prst="rect">
+            <a:avLst/>
+          </a:prstGeom>
+          <a:noFill/>
+        </p:spPr>
+        <p:txBody>
+          <a:bodyPr wrap="square">
+            <a:spAutoFit/>
+          </a:bodyPr>
+          <a:lstStyle/>
+          <a:p>
+            <a:r>
+              <a:rPr lang="en-IN" sz="2400" b="1" u="sng" dirty="0">
+                <a:solidFill>
+                  <a:schemeClr val="accent6">
+                    <a:lumMod val="60000"/>
+                    <a:lumOff val="40000"/>
+                  </a:schemeClr>
+                </a:solidFill>
+              </a:rPr>
+              <a:t>PROMPT</a:t>
+            </a:r>
+          </a:p>
+          <a:p>
+            <a:endParaRPr lang="en-IN" sz="2400" dirty="0">
               <a:solidFill>
                 <a:schemeClr val="accent6">
                   <a:lumMod val="60000"/>
@@ -4352,7 +5859,18 @@
           </a:p>
           <a:p>
             <a:r>
-              <a:rPr lang="en-US" sz="2400" b="1">
+              <a:rPr lang="en-IN" sz="2400" dirty="0">
+                <a:solidFill>
+                  <a:schemeClr val="accent6">
+                    <a:lumMod val="60000"/>
+                    <a:lumOff val="40000"/>
+                  </a:schemeClr>
+                </a:solidFill>
+              </a:rPr>
+              <a:t>You are an AI using the </a:t>
+            </a:r>
+            <a:r>
+              <a:rPr lang="en-IN" sz="2400" b="1" i="1" dirty="0" err="1">
                 <a:solidFill>
                   <a:schemeClr val="accent6">
                     <a:lumMod val="60000"/>
@@ -4363,6 +5881,334 @@
               <a:t>ReAct</a:t>
             </a:r>
             <a:r>
+              <a:rPr lang="en-IN" sz="2400" b="1" i="1" dirty="0">
+                <a:solidFill>
+                  <a:schemeClr val="accent6">
+                    <a:lumMod val="60000"/>
+                    <a:lumOff val="40000"/>
+                  </a:schemeClr>
+                </a:solidFill>
+              </a:rPr>
+              <a:t> (Reason + Act)</a:t>
+            </a:r>
+            <a:r>
+              <a:rPr lang="en-IN" sz="2400" dirty="0">
+                <a:solidFill>
+                  <a:schemeClr val="accent6">
+                    <a:lumMod val="60000"/>
+                    <a:lumOff val="40000"/>
+                  </a:schemeClr>
+                </a:solidFill>
+              </a:rPr>
+              <a:t> framework.</a:t>
+            </a:r>
+          </a:p>
+          <a:p>
+            <a:r>
+              <a:rPr lang="en-IN" sz="2400" dirty="0">
+                <a:solidFill>
+                  <a:schemeClr val="accent6">
+                    <a:lumMod val="60000"/>
+                    <a:lumOff val="40000"/>
+                  </a:schemeClr>
+                </a:solidFill>
+              </a:rPr>
+              <a:t>For each step, think through your </a:t>
+            </a:r>
+            <a:r>
+              <a:rPr lang="en-IN" sz="2400" b="1" i="1" dirty="0">
+                <a:solidFill>
+                  <a:schemeClr val="accent6">
+                    <a:lumMod val="60000"/>
+                    <a:lumOff val="40000"/>
+                  </a:schemeClr>
+                </a:solidFill>
+              </a:rPr>
+              <a:t>reasoning</a:t>
+            </a:r>
+            <a:r>
+              <a:rPr lang="en-IN" sz="2400" dirty="0">
+                <a:solidFill>
+                  <a:schemeClr val="accent6">
+                    <a:lumMod val="60000"/>
+                    <a:lumOff val="40000"/>
+                  </a:schemeClr>
+                </a:solidFill>
+              </a:rPr>
+              <a:t>, then decide on an</a:t>
+            </a:r>
+          </a:p>
+          <a:p>
+            <a:r>
+              <a:rPr lang="en-IN" sz="2400" b="1" i="1" dirty="0">
+                <a:solidFill>
+                  <a:schemeClr val="accent6">
+                    <a:lumMod val="60000"/>
+                    <a:lumOff val="40000"/>
+                  </a:schemeClr>
+                </a:solidFill>
+              </a:rPr>
+              <a:t>action</a:t>
+            </a:r>
+            <a:r>
+              <a:rPr lang="en-IN" sz="2400" dirty="0">
+                <a:solidFill>
+                  <a:schemeClr val="accent6">
+                    <a:lumMod val="60000"/>
+                    <a:lumOff val="40000"/>
+                  </a:schemeClr>
+                </a:solidFill>
+              </a:rPr>
+              <a:t>, and note your </a:t>
+            </a:r>
+            <a:r>
+              <a:rPr lang="en-IN" sz="2400" b="1" i="1" dirty="0">
+                <a:solidFill>
+                  <a:schemeClr val="accent6">
+                    <a:lumMod val="60000"/>
+                    <a:lumOff val="40000"/>
+                  </a:schemeClr>
+                </a:solidFill>
+              </a:rPr>
+              <a:t>observation</a:t>
+            </a:r>
+            <a:r>
+              <a:rPr lang="en-IN" sz="2400" dirty="0">
+                <a:solidFill>
+                  <a:schemeClr val="accent6">
+                    <a:lumMod val="60000"/>
+                    <a:lumOff val="40000"/>
+                  </a:schemeClr>
+                </a:solidFill>
+              </a:rPr>
+              <a:t> before concluding.</a:t>
+            </a:r>
+          </a:p>
+          <a:p>
+            <a:endParaRPr lang="en-IN" sz="2400" dirty="0">
+              <a:solidFill>
+                <a:schemeClr val="accent6">
+                  <a:lumMod val="60000"/>
+                  <a:lumOff val="40000"/>
+                </a:schemeClr>
+              </a:solidFill>
+            </a:endParaRPr>
+          </a:p>
+          <a:p>
+            <a:r>
+              <a:rPr lang="en-IN" sz="2400" dirty="0">
+                <a:solidFill>
+                  <a:schemeClr val="accent6">
+                    <a:lumMod val="60000"/>
+                    <a:lumOff val="40000"/>
+                  </a:schemeClr>
+                </a:solidFill>
+              </a:rPr>
+              <a:t>Question: Who won the Nobel Prize in Physics in 1921?</a:t>
+            </a:r>
+          </a:p>
+          <a:p>
+            <a:endParaRPr lang="en-IN" sz="2400" dirty="0">
+              <a:solidFill>
+                <a:schemeClr val="accent6">
+                  <a:lumMod val="60000"/>
+                  <a:lumOff val="40000"/>
+                </a:schemeClr>
+              </a:solidFill>
+            </a:endParaRPr>
+          </a:p>
+          <a:p>
+            <a:r>
+              <a:rPr lang="en-IN" sz="2400" dirty="0">
+                <a:solidFill>
+                  <a:schemeClr val="accent6">
+                    <a:lumMod val="60000"/>
+                    <a:lumOff val="40000"/>
+                  </a:schemeClr>
+                </a:solidFill>
+              </a:rPr>
+              <a:t>Use this format:</a:t>
+            </a:r>
+          </a:p>
+          <a:p>
+            <a:r>
+              <a:rPr lang="en-IN" sz="2400" b="1" i="1" dirty="0">
+                <a:solidFill>
+                  <a:schemeClr val="accent6">
+                    <a:lumMod val="60000"/>
+                    <a:lumOff val="40000"/>
+                  </a:schemeClr>
+                </a:solidFill>
+              </a:rPr>
+              <a:t>Thought:</a:t>
+            </a:r>
+          </a:p>
+          <a:p>
+            <a:r>
+              <a:rPr lang="en-IN" sz="2400" b="1" i="1" dirty="0">
+                <a:solidFill>
+                  <a:schemeClr val="accent6">
+                    <a:lumMod val="60000"/>
+                    <a:lumOff val="40000"/>
+                  </a:schemeClr>
+                </a:solidFill>
+              </a:rPr>
+              <a:t>Action:</a:t>
+            </a:r>
+          </a:p>
+          <a:p>
+            <a:r>
+              <a:rPr lang="en-IN" sz="2400" b="1" i="1" dirty="0">
+                <a:solidFill>
+                  <a:schemeClr val="accent6">
+                    <a:lumMod val="60000"/>
+                    <a:lumOff val="40000"/>
+                  </a:schemeClr>
+                </a:solidFill>
+              </a:rPr>
+              <a:t>Observation:</a:t>
+            </a:r>
+          </a:p>
+          <a:p>
+            <a:r>
+              <a:rPr lang="en-IN" sz="2400" b="1" i="1" dirty="0">
+                <a:solidFill>
+                  <a:schemeClr val="accent6">
+                    <a:lumMod val="60000"/>
+                    <a:lumOff val="40000"/>
+                  </a:schemeClr>
+                </a:solidFill>
+              </a:rPr>
+              <a:t>Final Answer:</a:t>
+            </a:r>
+          </a:p>
+        </p:txBody>
+      </p:sp>
+    </p:spTree>
+    <p:extLst>
+      <p:ext uri="{BB962C8B-B14F-4D97-AF65-F5344CB8AC3E}">
+        <p14:creationId xmlns:p14="http://schemas.microsoft.com/office/powerpoint/2010/main" val="3446032411"/>
+      </p:ext>
+    </p:extLst>
+  </p:cSld>
+  <p:clrMapOvr>
+    <a:masterClrMapping/>
+  </p:clrMapOvr>
+</p:sld>
+</file>
+
+<file path=ppt/slides/slide7.xml><?xml version="1.0" encoding="utf-8"?>
+<p:sld xmlns:a="http://schemas.openxmlformats.org/drawingml/2006/main" xmlns:r="http://schemas.openxmlformats.org/officeDocument/2006/relationships" xmlns:p="http://schemas.openxmlformats.org/presentationml/2006/main">
+  <p:cSld>
+    <p:spTree>
+      <p:nvGrpSpPr>
+        <p:cNvPr id="1" name="">
+          <a:extLst>
+            <a:ext uri="{FF2B5EF4-FFF2-40B4-BE49-F238E27FC236}">
+              <a16:creationId xmlns:a16="http://schemas.microsoft.com/office/drawing/2014/main" id="{3660B332-CB67-64DB-5713-DC84F3E0D21E}"/>
+            </a:ext>
+          </a:extLst>
+        </p:cNvPr>
+        <p:cNvGrpSpPr/>
+        <p:nvPr/>
+      </p:nvGrpSpPr>
+      <p:grpSpPr>
+        <a:xfrm>
+          <a:off x="0" y="0"/>
+          <a:ext cx="0" cy="0"/>
+          <a:chOff x="0" y="0"/>
+          <a:chExt cx="0" cy="0"/>
+        </a:xfrm>
+      </p:grpSpPr>
+      <p:pic>
+        <p:nvPicPr>
+          <p:cNvPr id="3" name="Picture 2">
+            <a:extLst>
+              <a:ext uri="{FF2B5EF4-FFF2-40B4-BE49-F238E27FC236}">
+                <a16:creationId xmlns:a16="http://schemas.microsoft.com/office/drawing/2014/main" id="{A2038A60-2889-3056-1B2B-F0D02A227900}"/>
+              </a:ext>
+            </a:extLst>
+          </p:cNvPr>
+          <p:cNvPicPr>
+            <a:picLocks noChangeAspect="1"/>
+          </p:cNvPicPr>
+          <p:nvPr/>
+        </p:nvPicPr>
+        <p:blipFill>
+          <a:blip r:embed="rId2"/>
+          <a:stretch>
+            <a:fillRect/>
+          </a:stretch>
+        </p:blipFill>
+        <p:spPr>
+          <a:xfrm>
+            <a:off x="4333155" y="246888"/>
+            <a:ext cx="5821778" cy="3467297"/>
+          </a:xfrm>
+          <a:prstGeom prst="rect">
+            <a:avLst/>
+          </a:prstGeom>
+        </p:spPr>
+      </p:pic>
+      <p:pic>
+        <p:nvPicPr>
+          <p:cNvPr id="6" name="Picture 5">
+            <a:extLst>
+              <a:ext uri="{FF2B5EF4-FFF2-40B4-BE49-F238E27FC236}">
+                <a16:creationId xmlns:a16="http://schemas.microsoft.com/office/drawing/2014/main" id="{D97367FA-E0B7-6243-7033-8578E53152BB}"/>
+              </a:ext>
+            </a:extLst>
+          </p:cNvPr>
+          <p:cNvPicPr>
+            <a:picLocks noChangeAspect="1"/>
+          </p:cNvPicPr>
+          <p:nvPr/>
+        </p:nvPicPr>
+        <p:blipFill>
+          <a:blip r:embed="rId3"/>
+          <a:stretch>
+            <a:fillRect/>
+          </a:stretch>
+        </p:blipFill>
+        <p:spPr>
+          <a:xfrm>
+            <a:off x="773564" y="4281734"/>
+            <a:ext cx="9070696" cy="2210506"/>
+          </a:xfrm>
+          <a:prstGeom prst="rect">
+            <a:avLst/>
+          </a:prstGeom>
+        </p:spPr>
+      </p:pic>
+      <p:sp>
+        <p:nvSpPr>
+          <p:cNvPr id="8" name="TextBox 7">
+            <a:extLst>
+              <a:ext uri="{FF2B5EF4-FFF2-40B4-BE49-F238E27FC236}">
+                <a16:creationId xmlns:a16="http://schemas.microsoft.com/office/drawing/2014/main" id="{FDC9963D-C96C-38E1-6F4E-16110CA91DC9}"/>
+              </a:ext>
+            </a:extLst>
+          </p:cNvPr>
+          <p:cNvSpPr txBox="1"/>
+          <p:nvPr/>
+        </p:nvSpPr>
+        <p:spPr>
+          <a:xfrm>
+            <a:off x="1522476" y="1225296"/>
+            <a:ext cx="2034540" cy="830997"/>
+          </a:xfrm>
+          <a:prstGeom prst="rect">
+            <a:avLst/>
+          </a:prstGeom>
+          <a:noFill/>
+        </p:spPr>
+        <p:txBody>
+          <a:bodyPr wrap="square">
+            <a:spAutoFit/>
+          </a:bodyPr>
+          <a:lstStyle/>
+          <a:p>
+            <a:r>
               <a:rPr lang="en-US" sz="2400" b="1" dirty="0">
                 <a:solidFill>
                   <a:schemeClr val="accent6">
@@ -4371,8 +6217,129 @@
                   </a:schemeClr>
                 </a:solidFill>
               </a:rPr>
-              <a:t> Output:</a:t>
-            </a:r>
+              <a:t>Output from </a:t>
+            </a:r>
+            <a:r>
+              <a:rPr lang="en-US" sz="2400" b="1" dirty="0" err="1">
+                <a:solidFill>
+                  <a:schemeClr val="accent6">
+                    <a:lumMod val="60000"/>
+                    <a:lumOff val="40000"/>
+                  </a:schemeClr>
+                </a:solidFill>
+              </a:rPr>
+              <a:t>chatgpt</a:t>
+            </a:r>
+            <a:endParaRPr lang="en-US" sz="2400" b="1" dirty="0">
+              <a:solidFill>
+                <a:schemeClr val="accent6">
+                  <a:lumMod val="60000"/>
+                  <a:lumOff val="40000"/>
+                </a:schemeClr>
+              </a:solidFill>
+            </a:endParaRPr>
+          </a:p>
+        </p:txBody>
+      </p:sp>
+    </p:spTree>
+    <p:extLst>
+      <p:ext uri="{BB962C8B-B14F-4D97-AF65-F5344CB8AC3E}">
+        <p14:creationId xmlns:p14="http://schemas.microsoft.com/office/powerpoint/2010/main" val="3494798595"/>
+      </p:ext>
+    </p:extLst>
+  </p:cSld>
+  <p:clrMapOvr>
+    <a:masterClrMapping/>
+  </p:clrMapOvr>
+</p:sld>
+</file>
+
+<file path=ppt/slides/slide8.xml><?xml version="1.0" encoding="utf-8"?>
+<p:sld xmlns:a="http://schemas.openxmlformats.org/drawingml/2006/main" xmlns:r="http://schemas.openxmlformats.org/officeDocument/2006/relationships" xmlns:p="http://schemas.openxmlformats.org/presentationml/2006/main">
+  <p:cSld>
+    <p:spTree>
+      <p:nvGrpSpPr>
+        <p:cNvPr id="1" name="">
+          <a:extLst>
+            <a:ext uri="{FF2B5EF4-FFF2-40B4-BE49-F238E27FC236}">
+              <a16:creationId xmlns:a16="http://schemas.microsoft.com/office/drawing/2014/main" id="{B1A603D0-9F24-1815-27FB-A9A2250AA030}"/>
+            </a:ext>
+          </a:extLst>
+        </p:cNvPr>
+        <p:cNvGrpSpPr/>
+        <p:nvPr/>
+      </p:nvGrpSpPr>
+      <p:grpSpPr>
+        <a:xfrm>
+          <a:off x="0" y="0"/>
+          <a:ext cx="0" cy="0"/>
+          <a:chOff x="0" y="0"/>
+          <a:chExt cx="0" cy="0"/>
+        </a:xfrm>
+      </p:grpSpPr>
+      <p:sp>
+        <p:nvSpPr>
+          <p:cNvPr id="8" name="TextBox 7">
+            <a:extLst>
+              <a:ext uri="{FF2B5EF4-FFF2-40B4-BE49-F238E27FC236}">
+                <a16:creationId xmlns:a16="http://schemas.microsoft.com/office/drawing/2014/main" id="{3E75B379-10CE-6BF0-2347-86E880B51AB8}"/>
+              </a:ext>
+            </a:extLst>
+          </p:cNvPr>
+          <p:cNvSpPr txBox="1"/>
+          <p:nvPr/>
+        </p:nvSpPr>
+        <p:spPr>
+          <a:xfrm>
+            <a:off x="672084" y="1335024"/>
+            <a:ext cx="10410444" cy="4524315"/>
+          </a:xfrm>
+          <a:prstGeom prst="rect">
+            <a:avLst/>
+          </a:prstGeom>
+          <a:noFill/>
+        </p:spPr>
+        <p:txBody>
+          <a:bodyPr wrap="square">
+            <a:spAutoFit/>
+          </a:bodyPr>
+          <a:lstStyle/>
+          <a:p>
+            <a:r>
+              <a:rPr lang="en-US" sz="2400" dirty="0">
+                <a:solidFill>
+                  <a:schemeClr val="accent6">
+                    <a:lumMod val="60000"/>
+                    <a:lumOff val="40000"/>
+                  </a:schemeClr>
+                </a:solidFill>
+              </a:rPr>
+              <a:t>You are an AI that uses </a:t>
+            </a:r>
+            <a:r>
+              <a:rPr lang="en-US" sz="2400" b="1" i="1" dirty="0" err="1">
+                <a:solidFill>
+                  <a:schemeClr val="accent6">
+                    <a:lumMod val="60000"/>
+                    <a:lumOff val="40000"/>
+                  </a:schemeClr>
+                </a:solidFill>
+              </a:rPr>
+              <a:t>ReAct</a:t>
+            </a:r>
+            <a:r>
+              <a:rPr lang="en-US" sz="2400" dirty="0">
+                <a:solidFill>
+                  <a:schemeClr val="accent6">
+                    <a:lumMod val="60000"/>
+                    <a:lumOff val="40000"/>
+                  </a:schemeClr>
+                </a:solidFill>
+              </a:rPr>
+              <a:t> prompting. At each step, explain your reasoning, perform the next action (like calculating or verifying), and then observe the result. Stop when you reach the final answer.</a:t>
+            </a:r>
+          </a:p>
+          <a:p>
             <a:endParaRPr lang="en-US" sz="2400" dirty="0">
               <a:solidFill>
                 <a:schemeClr val="accent6">
@@ -4392,8 +6359,18 @@
                   </a:schemeClr>
                 </a:solidFill>
               </a:rPr>
-              <a:t>Thought: I need to find 20% of 500 </a:t>
-            </a:r>
+              <a:t>Question: If Sarah is twice as old as Mike, and their combined age is 36, how old is Sarah?</a:t>
+            </a:r>
+          </a:p>
+          <a:p>
+            <a:endParaRPr lang="en-US" sz="2400" dirty="0">
+              <a:solidFill>
+                <a:schemeClr val="accent6">
+                  <a:lumMod val="60000"/>
+                  <a:lumOff val="40000"/>
+                </a:schemeClr>
+              </a:solidFill>
+            </a:endParaRPr>
           </a:p>
           <a:p>
             <a:r>
@@ -4405,46 +6382,101 @@
                   </a:schemeClr>
                 </a:solidFill>
               </a:rPr>
-              <a:t>Action: 500 × 0.20 = 100 </a:t>
-            </a:r>
-          </a:p>
-          <a:p>
-            <a:r>
-              <a:rPr lang="en-US" sz="2400" dirty="0">
-                <a:solidFill>
-                  <a:schemeClr val="accent6">
-                    <a:lumMod val="60000"/>
-                    <a:lumOff val="40000"/>
-                  </a:schemeClr>
-                </a:solidFill>
-              </a:rPr>
-              <a:t>Thought: Subtract discount from original price </a:t>
-            </a:r>
-          </a:p>
-          <a:p>
-            <a:r>
-              <a:rPr lang="en-US" sz="2400" dirty="0">
-                <a:solidFill>
-                  <a:schemeClr val="accent6">
-                    <a:lumMod val="60000"/>
-                    <a:lumOff val="40000"/>
-                  </a:schemeClr>
-                </a:solidFill>
-              </a:rPr>
-              <a:t>Action: 500 − 100 = 400 </a:t>
-            </a:r>
-          </a:p>
-          <a:p>
-            <a:r>
-              <a:rPr lang="en-US" sz="2400" dirty="0">
-                <a:solidFill>
-                  <a:schemeClr val="accent6">
-                    <a:lumMod val="60000"/>
-                    <a:lumOff val="40000"/>
-                  </a:schemeClr>
-                </a:solidFill>
-              </a:rPr>
-              <a:t>Final Answer: ₹400</a:t>
+              <a:t>Use this format:</a:t>
+            </a:r>
+          </a:p>
+          <a:p>
+            <a:r>
+              <a:rPr lang="en-US" sz="2400" b="1" i="1" dirty="0">
+                <a:solidFill>
+                  <a:schemeClr val="accent6">
+                    <a:lumMod val="60000"/>
+                    <a:lumOff val="40000"/>
+                  </a:schemeClr>
+                </a:solidFill>
+              </a:rPr>
+              <a:t>Thought:</a:t>
+            </a:r>
+          </a:p>
+          <a:p>
+            <a:r>
+              <a:rPr lang="en-US" sz="2400" b="1" i="1" dirty="0">
+                <a:solidFill>
+                  <a:schemeClr val="accent6">
+                    <a:lumMod val="60000"/>
+                    <a:lumOff val="40000"/>
+                  </a:schemeClr>
+                </a:solidFill>
+              </a:rPr>
+              <a:t>Action:</a:t>
+            </a:r>
+          </a:p>
+          <a:p>
+            <a:r>
+              <a:rPr lang="en-US" sz="2400" b="1" i="1" dirty="0">
+                <a:solidFill>
+                  <a:schemeClr val="accent6">
+                    <a:lumMod val="60000"/>
+                    <a:lumOff val="40000"/>
+                  </a:schemeClr>
+                </a:solidFill>
+              </a:rPr>
+              <a:t>Observation:</a:t>
+            </a:r>
+          </a:p>
+          <a:p>
+            <a:r>
+              <a:rPr lang="en-US" sz="2400" b="1" i="1" dirty="0">
+                <a:solidFill>
+                  <a:schemeClr val="accent6">
+                    <a:lumMod val="60000"/>
+                    <a:lumOff val="40000"/>
+                  </a:schemeClr>
+                </a:solidFill>
+              </a:rPr>
+              <a:t>Final Answer:</a:t>
+            </a:r>
+          </a:p>
+        </p:txBody>
+      </p:sp>
+      <p:sp>
+        <p:nvSpPr>
+          <p:cNvPr id="4" name="TextBox 3">
+            <a:extLst>
+              <a:ext uri="{FF2B5EF4-FFF2-40B4-BE49-F238E27FC236}">
+                <a16:creationId xmlns:a16="http://schemas.microsoft.com/office/drawing/2014/main" id="{AE4585B0-F791-25A4-73A5-77235B20D030}"/>
+              </a:ext>
+            </a:extLst>
+          </p:cNvPr>
+          <p:cNvSpPr txBox="1"/>
+          <p:nvPr/>
+        </p:nvSpPr>
+        <p:spPr>
+          <a:xfrm>
+            <a:off x="1897380" y="208080"/>
+            <a:ext cx="6190488" cy="461665"/>
+          </a:xfrm>
+          <a:prstGeom prst="rect">
+            <a:avLst/>
+          </a:prstGeom>
+          <a:noFill/>
+        </p:spPr>
+        <p:txBody>
+          <a:bodyPr wrap="square">
+            <a:spAutoFit/>
+          </a:bodyPr>
+          <a:lstStyle/>
+          <a:p>
+            <a:r>
+              <a:rPr lang="en-US" sz="2400" b="1" dirty="0">
+                <a:solidFill>
+                  <a:schemeClr val="accent6">
+                    <a:lumMod val="60000"/>
+                    <a:lumOff val="40000"/>
+                  </a:schemeClr>
+                </a:solidFill>
+              </a:rPr>
+              <a:t>Example: Logical Problem Multistep Reasoning</a:t>
             </a:r>
           </a:p>
         </p:txBody>
@@ -4452,7 +6484,164 @@
     </p:spTree>
     <p:extLst>
       <p:ext uri="{BB962C8B-B14F-4D97-AF65-F5344CB8AC3E}">
-        <p14:creationId xmlns:p14="http://schemas.microsoft.com/office/powerpoint/2010/main" val="1542318831"/>
+        <p14:creationId xmlns:p14="http://schemas.microsoft.com/office/powerpoint/2010/main" val="1316833252"/>
+      </p:ext>
+    </p:extLst>
+  </p:cSld>
+  <p:clrMapOvr>
+    <a:masterClrMapping/>
+  </p:clrMapOvr>
+</p:sld>
+</file>
+
+<file path=ppt/slides/slide9.xml><?xml version="1.0" encoding="utf-8"?>
+<p:sld xmlns:a="http://schemas.openxmlformats.org/drawingml/2006/main" xmlns:r="http://schemas.openxmlformats.org/officeDocument/2006/relationships" xmlns:p="http://schemas.openxmlformats.org/presentationml/2006/main">
+  <p:cSld>
+    <p:spTree>
+      <p:nvGrpSpPr>
+        <p:cNvPr id="1" name="">
+          <a:extLst>
+            <a:ext uri="{FF2B5EF4-FFF2-40B4-BE49-F238E27FC236}">
+              <a16:creationId xmlns:a16="http://schemas.microsoft.com/office/drawing/2014/main" id="{5DDAC3E0-3DC0-AF12-7391-C43F6EEFC8C4}"/>
+            </a:ext>
+          </a:extLst>
+        </p:cNvPr>
+        <p:cNvGrpSpPr/>
+        <p:nvPr/>
+      </p:nvGrpSpPr>
+      <p:grpSpPr>
+        <a:xfrm>
+          <a:off x="0" y="0"/>
+          <a:ext cx="0" cy="0"/>
+          <a:chOff x="0" y="0"/>
+          <a:chExt cx="0" cy="0"/>
+        </a:xfrm>
+      </p:grpSpPr>
+      <p:sp>
+        <p:nvSpPr>
+          <p:cNvPr id="8" name="TextBox 7">
+            <a:extLst>
+              <a:ext uri="{FF2B5EF4-FFF2-40B4-BE49-F238E27FC236}">
+                <a16:creationId xmlns:a16="http://schemas.microsoft.com/office/drawing/2014/main" id="{76CE5696-499B-347E-BCF1-049A12CC8C65}"/>
+              </a:ext>
+            </a:extLst>
+          </p:cNvPr>
+          <p:cNvSpPr txBox="1"/>
+          <p:nvPr/>
+        </p:nvSpPr>
+        <p:spPr>
+          <a:xfrm>
+            <a:off x="1522476" y="1225296"/>
+            <a:ext cx="2034540" cy="830997"/>
+          </a:xfrm>
+          <a:prstGeom prst="rect">
+            <a:avLst/>
+          </a:prstGeom>
+          <a:noFill/>
+        </p:spPr>
+        <p:txBody>
+          <a:bodyPr wrap="square">
+            <a:spAutoFit/>
+          </a:bodyPr>
+          <a:lstStyle/>
+          <a:p>
+            <a:r>
+              <a:rPr lang="en-US" sz="2400" b="1" dirty="0">
+                <a:solidFill>
+                  <a:schemeClr val="accent6">
+                    <a:lumMod val="60000"/>
+                    <a:lumOff val="40000"/>
+                  </a:schemeClr>
+                </a:solidFill>
+              </a:rPr>
+              <a:t>Output from </a:t>
+            </a:r>
+            <a:r>
+              <a:rPr lang="en-US" sz="2400" b="1" dirty="0" err="1">
+                <a:solidFill>
+                  <a:schemeClr val="accent6">
+                    <a:lumMod val="60000"/>
+                    <a:lumOff val="40000"/>
+                  </a:schemeClr>
+                </a:solidFill>
+              </a:rPr>
+              <a:t>chatgpt</a:t>
+            </a:r>
+            <a:endParaRPr lang="en-US" sz="2400" b="1" dirty="0">
+              <a:solidFill>
+                <a:schemeClr val="accent6">
+                  <a:lumMod val="60000"/>
+                  <a:lumOff val="40000"/>
+                </a:schemeClr>
+              </a:solidFill>
+            </a:endParaRPr>
+          </a:p>
+        </p:txBody>
+      </p:sp>
+      <p:pic>
+        <p:nvPicPr>
+          <p:cNvPr id="4" name="Picture 3">
+            <a:extLst>
+              <a:ext uri="{FF2B5EF4-FFF2-40B4-BE49-F238E27FC236}">
+                <a16:creationId xmlns:a16="http://schemas.microsoft.com/office/drawing/2014/main" id="{B27B7676-DD1F-6517-91F2-767B9252796F}"/>
+              </a:ext>
+            </a:extLst>
+          </p:cNvPr>
+          <p:cNvPicPr>
+            <a:picLocks noChangeAspect="1"/>
+          </p:cNvPicPr>
+          <p:nvPr/>
+        </p:nvPicPr>
+        <p:blipFill>
+          <a:blip r:embed="rId2"/>
+          <a:stretch>
+            <a:fillRect/>
+          </a:stretch>
+        </p:blipFill>
+        <p:spPr>
+          <a:xfrm>
+            <a:off x="4401660" y="226147"/>
+            <a:ext cx="6374539" cy="3660292"/>
+          </a:xfrm>
+          <a:prstGeom prst="rect">
+            <a:avLst/>
+          </a:prstGeom>
+        </p:spPr>
+      </p:pic>
+      <p:pic>
+        <p:nvPicPr>
+          <p:cNvPr id="7" name="Picture 6">
+            <a:extLst>
+              <a:ext uri="{FF2B5EF4-FFF2-40B4-BE49-F238E27FC236}">
+                <a16:creationId xmlns:a16="http://schemas.microsoft.com/office/drawing/2014/main" id="{EA59A2D8-6E70-3017-5133-3D75C6A17221}"/>
+              </a:ext>
+            </a:extLst>
+          </p:cNvPr>
+          <p:cNvPicPr>
+            <a:picLocks noChangeAspect="1"/>
+          </p:cNvPicPr>
+          <p:nvPr/>
+        </p:nvPicPr>
+        <p:blipFill>
+          <a:blip r:embed="rId3"/>
+          <a:stretch>
+            <a:fillRect/>
+          </a:stretch>
+        </p:blipFill>
+        <p:spPr>
+          <a:xfrm>
+            <a:off x="980754" y="4473056"/>
+            <a:ext cx="9342404" cy="2012747"/>
+          </a:xfrm>
+          <a:prstGeom prst="rect">
+            <a:avLst/>
+          </a:prstGeom>
+        </p:spPr>
+      </p:pic>
+    </p:spTree>
+    <p:extLst>
+      <p:ext uri="{BB962C8B-B14F-4D97-AF65-F5344CB8AC3E}">
+        <p14:creationId xmlns:p14="http://schemas.microsoft.com/office/powerpoint/2010/main" val="870774459"/>
       </p:ext>
     </p:extLst>
   </p:cSld>

--- a/prompt_engineering/pe-4-advanced-ReAct_prompting.pptx
+++ b/prompt_engineering/pe-4-advanced-ReAct_prompting.pptx
@@ -224,7 +224,7 @@
           <a:p>
             <a:fld id="{7BAEECA8-D063-486F-AE31-5020270C1449}" type="datetimeFigureOut">
               <a:rPr lang="en-US" smtClean="0"/>
-              <a:t>9/20/2026</a:t>
+              <a:t>10/29/2026</a:t>
             </a:fld>
             <a:endParaRPr lang="en-US"/>
           </a:p>
@@ -466,7 +466,7 @@
           <a:p>
             <a:fld id="{6383FAE1-13DE-4511-8C1B-C8AFB720664C}" type="datetimeFigureOut">
               <a:rPr lang="en-US" smtClean="0"/>
-              <a:t>9/20/2026</a:t>
+              <a:t>10/29/2026</a:t>
             </a:fld>
             <a:endParaRPr lang="en-US"/>
           </a:p>
@@ -664,7 +664,7 @@
           <a:p>
             <a:fld id="{6383FAE1-13DE-4511-8C1B-C8AFB720664C}" type="datetimeFigureOut">
               <a:rPr lang="en-US" smtClean="0"/>
-              <a:t>9/20/2026</a:t>
+              <a:t>10/29/2026</a:t>
             </a:fld>
             <a:endParaRPr lang="en-US"/>
           </a:p>
@@ -872,7 +872,7 @@
           <a:p>
             <a:fld id="{6383FAE1-13DE-4511-8C1B-C8AFB720664C}" type="datetimeFigureOut">
               <a:rPr lang="en-US" smtClean="0"/>
-              <a:t>9/20/2026</a:t>
+              <a:t>10/29/2026</a:t>
             </a:fld>
             <a:endParaRPr lang="en-US"/>
           </a:p>
@@ -1070,7 +1070,7 @@
           <a:p>
             <a:fld id="{6383FAE1-13DE-4511-8C1B-C8AFB720664C}" type="datetimeFigureOut">
               <a:rPr lang="en-US" smtClean="0"/>
-              <a:t>9/20/2026</a:t>
+              <a:t>10/29/2026</a:t>
             </a:fld>
             <a:endParaRPr lang="en-US"/>
           </a:p>
@@ -1345,7 +1345,7 @@
           <a:p>
             <a:fld id="{6383FAE1-13DE-4511-8C1B-C8AFB720664C}" type="datetimeFigureOut">
               <a:rPr lang="en-US" smtClean="0"/>
-              <a:t>9/20/2026</a:t>
+              <a:t>10/29/2026</a:t>
             </a:fld>
             <a:endParaRPr lang="en-US"/>
           </a:p>
@@ -1610,7 +1610,7 @@
           <a:p>
             <a:fld id="{6383FAE1-13DE-4511-8C1B-C8AFB720664C}" type="datetimeFigureOut">
               <a:rPr lang="en-US" smtClean="0"/>
-              <a:t>9/20/2026</a:t>
+              <a:t>10/29/2026</a:t>
             </a:fld>
             <a:endParaRPr lang="en-US"/>
           </a:p>
@@ -2022,7 +2022,7 @@
           <a:p>
             <a:fld id="{6383FAE1-13DE-4511-8C1B-C8AFB720664C}" type="datetimeFigureOut">
               <a:rPr lang="en-US" smtClean="0"/>
-              <a:t>9/20/2026</a:t>
+              <a:t>10/29/2026</a:t>
             </a:fld>
             <a:endParaRPr lang="en-US"/>
           </a:p>
@@ -2163,7 +2163,7 @@
           <a:p>
             <a:fld id="{6383FAE1-13DE-4511-8C1B-C8AFB720664C}" type="datetimeFigureOut">
               <a:rPr lang="en-US" smtClean="0"/>
-              <a:t>9/20/2026</a:t>
+              <a:t>10/29/2026</a:t>
             </a:fld>
             <a:endParaRPr lang="en-US"/>
           </a:p>
@@ -2276,7 +2276,7 @@
           <a:p>
             <a:fld id="{6383FAE1-13DE-4511-8C1B-C8AFB720664C}" type="datetimeFigureOut">
               <a:rPr lang="en-US" smtClean="0"/>
-              <a:t>9/20/2026</a:t>
+              <a:t>10/29/2026</a:t>
             </a:fld>
             <a:endParaRPr lang="en-US"/>
           </a:p>
@@ -2587,7 +2587,7 @@
           <a:p>
             <a:fld id="{6383FAE1-13DE-4511-8C1B-C8AFB720664C}" type="datetimeFigureOut">
               <a:rPr lang="en-US" smtClean="0"/>
-              <a:t>9/20/2026</a:t>
+              <a:t>10/29/2026</a:t>
             </a:fld>
             <a:endParaRPr lang="en-US"/>
           </a:p>
@@ -2878,7 +2878,7 @@
           <a:p>
             <a:fld id="{6383FAE1-13DE-4511-8C1B-C8AFB720664C}" type="datetimeFigureOut">
               <a:rPr lang="en-US" smtClean="0"/>
-              <a:t>9/20/2026</a:t>
+              <a:t>10/29/2026</a:t>
             </a:fld>
             <a:endParaRPr lang="en-US"/>
           </a:p>
@@ -3122,7 +3122,7 @@
           <a:p>
             <a:fld id="{6383FAE1-13DE-4511-8C1B-C8AFB720664C}" type="datetimeFigureOut">
               <a:rPr lang="en-US" smtClean="0"/>
-              <a:t>9/20/2026</a:t>
+              <a:t>10/29/2026</a:t>
             </a:fld>
             <a:endParaRPr lang="en-US"/>
           </a:p>
@@ -5115,7 +5115,7 @@
         </p:nvSpPr>
         <p:spPr>
           <a:xfrm>
-            <a:off x="731520" y="428179"/>
+            <a:off x="320040" y="126427"/>
             <a:ext cx="10287000" cy="5632311"/>
           </a:xfrm>
           <a:prstGeom prst="rect">
